--- a/theory_09-authorization/theory_09-authorization.pptx
+++ b/theory_09-authorization/theory_09-authorization.pptx
@@ -226,7 +226,7 @@
           <a:p>
             <a:fld id="{251090E0-FB0C-49E9-9864-9F53EABEA96F}" type="datetimeFigureOut">
               <a:rPr lang="en-GB" smtClean="0"/>
-              <a:t>21/02/2024</a:t>
+              <a:t>14/04/2025</a:t>
             </a:fld>
             <a:endParaRPr lang="en-GB"/>
           </a:p>
@@ -1534,6 +1534,9 @@
             <a:off x="428172" y="161926"/>
             <a:ext cx="11368314" cy="860243"/>
           </a:xfrm>
+          <a:prstGeom prst="rect">
+            <a:avLst/>
+          </a:prstGeom>
         </p:spPr>
         <p:txBody>
           <a:bodyPr/>
@@ -1582,6 +1585,9 @@
             <a:off x="428172" y="1361167"/>
             <a:ext cx="11368314" cy="4858203"/>
           </a:xfrm>
+          <a:prstGeom prst="rect">
+            <a:avLst/>
+          </a:prstGeom>
         </p:spPr>
         <p:txBody>
           <a:bodyPr/>
@@ -1701,7 +1707,15 @@
             <p:ph type="sldNum" sz="quarter" idx="12"/>
           </p:nvPr>
         </p:nvSpPr>
-        <p:spPr/>
+        <p:spPr>
+          <a:xfrm>
+            <a:off x="8610600" y="6356350"/>
+            <a:ext cx="3185886" cy="365125"/>
+          </a:xfrm>
+          <a:prstGeom prst="rect">
+            <a:avLst/>
+          </a:prstGeom>
+        </p:spPr>
         <p:txBody>
           <a:bodyPr/>
           <a:lstStyle/>
@@ -1809,6 +1823,9 @@
             <a:off x="428172" y="161926"/>
             <a:ext cx="11368314" cy="860243"/>
           </a:xfrm>
+          <a:prstGeom prst="rect">
+            <a:avLst/>
+          </a:prstGeom>
         </p:spPr>
         <p:txBody>
           <a:bodyPr/>
@@ -1857,6 +1874,9 @@
             <a:off x="428172" y="1364343"/>
             <a:ext cx="5591628" cy="4812620"/>
           </a:xfrm>
+          <a:prstGeom prst="rect">
+            <a:avLst/>
+          </a:prstGeom>
         </p:spPr>
         <p:txBody>
           <a:bodyPr/>
@@ -1973,6 +1993,9 @@
             <a:off x="6172200" y="1364343"/>
             <a:ext cx="5624286" cy="4812620"/>
           </a:xfrm>
+          <a:prstGeom prst="rect">
+            <a:avLst/>
+          </a:prstGeom>
         </p:spPr>
         <p:txBody>
           <a:bodyPr/>
@@ -2084,7 +2107,15 @@
             <p:ph type="sldNum" sz="quarter" idx="12"/>
           </p:nvPr>
         </p:nvSpPr>
-        <p:spPr/>
+        <p:spPr>
+          <a:xfrm>
+            <a:off x="8610600" y="6356350"/>
+            <a:ext cx="3185886" cy="365125"/>
+          </a:xfrm>
+          <a:prstGeom prst="rect">
+            <a:avLst/>
+          </a:prstGeom>
+        </p:spPr>
         <p:txBody>
           <a:bodyPr/>
           <a:lstStyle/>
@@ -2192,6 +2223,9 @@
             <a:off x="1426028" y="2355399"/>
             <a:ext cx="9456058" cy="1570716"/>
           </a:xfrm>
+          <a:prstGeom prst="rect">
+            <a:avLst/>
+          </a:prstGeom>
         </p:spPr>
         <p:txBody>
           <a:bodyPr anchor="ctr">
@@ -2200,7 +2234,9 @@
           <a:lstStyle>
             <a:lvl1pPr marL="0" indent="0" algn="ctr">
               <a:buNone/>
-              <a:defRPr sz="4800" b="1"/>
+              <a:defRPr sz="4800" b="1">
+                <a:latin typeface="Aptos" panose="020B0004020202020204" pitchFamily="34" charset="0"/>
+              </a:defRPr>
             </a:lvl1pPr>
             <a:lvl2pPr marL="457200" indent="0" algn="ctr">
               <a:buNone/>
@@ -2286,7 +2322,9 @@
           <a:lstStyle/>
           <a:p>
             <a:pPr algn="ctr"/>
-            <a:endParaRPr lang="en-GB" dirty="0"/>
+            <a:endParaRPr lang="en-GB" dirty="0">
+              <a:latin typeface="Aptos" panose="020B0004020202020204" pitchFamily="34" charset="0"/>
+            </a:endParaRPr>
           </a:p>
         </p:txBody>
       </p:sp>
@@ -2336,7 +2374,9 @@
           <a:lstStyle/>
           <a:p>
             <a:pPr algn="ctr"/>
-            <a:endParaRPr lang="en-GB" dirty="0"/>
+            <a:endParaRPr lang="en-GB" dirty="0">
+              <a:latin typeface="Aptos" panose="020B0004020202020204" pitchFamily="34" charset="0"/>
+            </a:endParaRPr>
           </a:p>
         </p:txBody>
       </p:sp>
@@ -2382,36 +2422,52 @@
           </a:lstStyle>
           <a:p>
             <a:r>
-              <a:rPr lang="it-IT" sz="2800" b="0" dirty="0" err="1"/>
+              <a:rPr lang="it-IT" sz="2800" b="0" dirty="0" err="1">
+                <a:latin typeface="Aptos" panose="020B0004020202020204" pitchFamily="34" charset="0"/>
+              </a:rPr>
               <a:t>Biomedical</a:t>
             </a:r>
             <a:r>
-              <a:rPr lang="it-IT" sz="2800" b="0" dirty="0"/>
+              <a:rPr lang="it-IT" sz="2800" b="0" dirty="0">
+                <a:latin typeface="Aptos" panose="020B0004020202020204" pitchFamily="34" charset="0"/>
+              </a:rPr>
               <a:t> </a:t>
             </a:r>
             <a:r>
-              <a:rPr lang="it-IT" sz="2800" b="0" dirty="0" err="1"/>
+              <a:rPr lang="it-IT" sz="2800" b="0" dirty="0" err="1">
+                <a:latin typeface="Aptos" panose="020B0004020202020204" pitchFamily="34" charset="0"/>
+              </a:rPr>
               <a:t>Wearable</a:t>
             </a:r>
             <a:r>
-              <a:rPr lang="it-IT" sz="2800" b="0" dirty="0"/>
+              <a:rPr lang="it-IT" sz="2800" b="0" dirty="0">
+                <a:latin typeface="Aptos" panose="020B0004020202020204" pitchFamily="34" charset="0"/>
+              </a:rPr>
               <a:t> Technologies </a:t>
             </a:r>
           </a:p>
           <a:p>
             <a:r>
-              <a:rPr lang="it-IT" sz="2800" b="0" dirty="0"/>
+              <a:rPr lang="it-IT" sz="2800" b="0" dirty="0">
+                <a:latin typeface="Aptos" panose="020B0004020202020204" pitchFamily="34" charset="0"/>
+              </a:rPr>
               <a:t>for Healthcare and </a:t>
             </a:r>
             <a:r>
-              <a:rPr lang="it-IT" sz="2800" b="0" dirty="0" err="1"/>
+              <a:rPr lang="it-IT" sz="2800" b="0" dirty="0" err="1">
+                <a:latin typeface="Aptos" panose="020B0004020202020204" pitchFamily="34" charset="0"/>
+              </a:rPr>
               <a:t>Wellbeing</a:t>
             </a:r>
             <a:r>
-              <a:rPr lang="it-IT" sz="2800" b="0" dirty="0"/>
+              <a:rPr lang="it-IT" sz="2800" b="0" dirty="0">
+                <a:latin typeface="Aptos" panose="020B0004020202020204" pitchFamily="34" charset="0"/>
+              </a:rPr>
               <a:t>  </a:t>
             </a:r>
-            <a:endParaRPr lang="en-GB" sz="2800" b="0" dirty="0"/>
+            <a:endParaRPr lang="en-GB" sz="2800" b="0" dirty="0">
+              <a:latin typeface="Aptos" panose="020B0004020202020204" pitchFamily="34" charset="0"/>
+            </a:endParaRPr>
           </a:p>
         </p:txBody>
       </p:sp>
@@ -2462,8 +2518,10 @@
               </a:spcAft>
             </a:pPr>
             <a:r>
-              <a:rPr lang="it-IT" sz="2800" dirty="0"/>
-              <a:t>A.Y. 2023-2024</a:t>
+              <a:rPr lang="it-IT" sz="2800" dirty="0">
+                <a:latin typeface="Aptos" panose="020B0004020202020204" pitchFamily="34" charset="0"/>
+              </a:rPr>
+              <a:t>A.Y. 2024-2025</a:t>
             </a:r>
           </a:p>
           <a:p>
@@ -2473,7 +2531,9 @@
               </a:spcAft>
             </a:pPr>
             <a:r>
-              <a:rPr lang="it-IT" sz="2800" baseline="0" dirty="0"/>
+              <a:rPr lang="it-IT" sz="2800" baseline="0" dirty="0">
+                <a:latin typeface="Aptos" panose="020B0004020202020204" pitchFamily="34" charset="0"/>
+              </a:rPr>
               <a:t>Giacomo Cappon</a:t>
             </a:r>
           </a:p>
@@ -2513,7 +2573,7 @@
                 <a:effectLst/>
                 <a:uLnTx/>
                 <a:uFillTx/>
-                <a:latin typeface="Palatino Linotype" panose="02040502050505030304" pitchFamily="18" charset="0"/>
+                <a:latin typeface="Aptos" panose="020B0004020202020204" pitchFamily="34" charset="0"/>
                 <a:ea typeface="+mj-ea"/>
                 <a:cs typeface="+mj-cs"/>
               </a:rPr>
@@ -2530,7 +2590,7 @@
                 <a:effectLst/>
                 <a:uLnTx/>
                 <a:uFillTx/>
-                <a:latin typeface="Palatino Linotype" panose="02040502050505030304" pitchFamily="18" charset="0"/>
+                <a:latin typeface="Aptos" panose="020B0004020202020204" pitchFamily="34" charset="0"/>
                 <a:ea typeface="+mj-ea"/>
                 <a:cs typeface="+mj-cs"/>
               </a:rPr>
@@ -2547,7 +2607,7 @@
                 <a:effectLst/>
                 <a:uLnTx/>
                 <a:uFillTx/>
-                <a:latin typeface="Palatino Linotype" panose="02040502050505030304" pitchFamily="18" charset="0"/>
+                <a:latin typeface="Aptos" panose="020B0004020202020204" pitchFamily="34" charset="0"/>
                 <a:ea typeface="+mj-ea"/>
                 <a:cs typeface="+mj-cs"/>
               </a:rPr>
@@ -2563,7 +2623,7 @@
                 <a:effectLst/>
                 <a:uLnTx/>
                 <a:uFillTx/>
-                <a:latin typeface="Palatino Linotype" panose="02040502050505030304" pitchFamily="18" charset="0"/>
+                <a:latin typeface="Aptos" panose="020B0004020202020204" pitchFamily="34" charset="0"/>
                 <a:ea typeface="+mj-ea"/>
                 <a:cs typeface="+mj-cs"/>
               </a:rPr>
@@ -2580,7 +2640,7 @@
                 <a:effectLst/>
                 <a:uLnTx/>
                 <a:uFillTx/>
-                <a:latin typeface="Palatino Linotype" panose="02040502050505030304" pitchFamily="18" charset="0"/>
+                <a:latin typeface="Aptos" panose="020B0004020202020204" pitchFamily="34" charset="0"/>
                 <a:ea typeface="+mj-ea"/>
                 <a:cs typeface="+mj-cs"/>
               </a:rPr>
@@ -2597,13 +2657,15 @@
                 <a:effectLst/>
                 <a:uLnTx/>
                 <a:uFillTx/>
-                <a:latin typeface="Palatino Linotype" panose="02040502050505030304" pitchFamily="18" charset="0"/>
+                <a:latin typeface="Aptos" panose="020B0004020202020204" pitchFamily="34" charset="0"/>
                 <a:ea typeface="+mj-ea"/>
                 <a:cs typeface="+mj-cs"/>
               </a:rPr>
               <a:t>Engineering</a:t>
             </a:r>
-            <a:endParaRPr lang="en-GB" sz="1100" cap="small" baseline="0" dirty="0"/>
+            <a:endParaRPr lang="en-GB" sz="1100" cap="small" baseline="0" dirty="0">
+              <a:latin typeface="Aptos" panose="020B0004020202020204" pitchFamily="34" charset="0"/>
+            </a:endParaRPr>
           </a:p>
         </p:txBody>
       </p:sp>
@@ -2730,6 +2792,9 @@
             <a:off x="428172" y="161926"/>
             <a:ext cx="11368314" cy="905962"/>
           </a:xfrm>
+          <a:prstGeom prst="rect">
+            <a:avLst/>
+          </a:prstGeom>
         </p:spPr>
         <p:txBody>
           <a:bodyPr/>
@@ -2773,7 +2838,15 @@
             <p:ph type="sldNum" sz="quarter" idx="12"/>
           </p:nvPr>
         </p:nvSpPr>
-        <p:spPr/>
+        <p:spPr>
+          <a:xfrm>
+            <a:off x="8610600" y="6356350"/>
+            <a:ext cx="3185886" cy="365125"/>
+          </a:xfrm>
+          <a:prstGeom prst="rect">
+            <a:avLst/>
+          </a:prstGeom>
+        </p:spPr>
         <p:txBody>
           <a:bodyPr/>
           <a:lstStyle/>
@@ -3074,12 +3147,14 @@
                     <a:tint val="75000"/>
                   </a:schemeClr>
                 </a:solidFill>
+                <a:latin typeface="Aptos" panose="020B0004020202020204" pitchFamily="34" charset="0"/>
               </a:defRPr>
             </a:lvl1pPr>
           </a:lstStyle>
           <a:p>
             <a:fld id="{31DE2C5B-556E-47B8-A792-024C2FCA4ACC}" type="slidenum">
               <a:rPr lang="en-GB" smtClean="0"/>
+              <a:pPr/>
               <a:t>‹#›</a:t>
             </a:fld>
             <a:endParaRPr lang="en-GB"/>
@@ -3115,7 +3190,7 @@
           <a:solidFill>
             <a:schemeClr val="tx1"/>
           </a:solidFill>
-          <a:latin typeface="Palatino Linotype" panose="02040502050505030304" pitchFamily="18" charset="0"/>
+          <a:latin typeface="Aptos" panose="020B0004020202020204" pitchFamily="34" charset="0"/>
           <a:ea typeface="+mj-ea"/>
           <a:cs typeface="+mj-cs"/>
         </a:defRPr>
@@ -3138,7 +3213,7 @@
           <a:solidFill>
             <a:schemeClr val="tx1"/>
           </a:solidFill>
-          <a:latin typeface="Palatino Linotype" panose="02040502050505030304" pitchFamily="18" charset="0"/>
+          <a:latin typeface="Aptos" panose="020B0004020202020204" pitchFamily="34" charset="0"/>
           <a:ea typeface="+mn-ea"/>
           <a:cs typeface="+mn-cs"/>
         </a:defRPr>
@@ -3159,7 +3234,7 @@
           <a:solidFill>
             <a:schemeClr val="tx1"/>
           </a:solidFill>
-          <a:latin typeface="Palatino Linotype" panose="02040502050505030304" pitchFamily="18" charset="0"/>
+          <a:latin typeface="Aptos" panose="020B0004020202020204" pitchFamily="34" charset="0"/>
           <a:ea typeface="+mn-ea"/>
           <a:cs typeface="+mn-cs"/>
         </a:defRPr>
@@ -3180,7 +3255,7 @@
           <a:solidFill>
             <a:schemeClr val="tx1"/>
           </a:solidFill>
-          <a:latin typeface="Palatino Linotype" panose="02040502050505030304" pitchFamily="18" charset="0"/>
+          <a:latin typeface="Aptos" panose="020B0004020202020204" pitchFamily="34" charset="0"/>
           <a:ea typeface="+mn-ea"/>
           <a:cs typeface="+mn-cs"/>
         </a:defRPr>
@@ -3201,7 +3276,7 @@
           <a:solidFill>
             <a:schemeClr val="tx1"/>
           </a:solidFill>
-          <a:latin typeface="Palatino Linotype" panose="02040502050505030304" pitchFamily="18" charset="0"/>
+          <a:latin typeface="Aptos" panose="020B0004020202020204" pitchFamily="34" charset="0"/>
           <a:ea typeface="+mn-ea"/>
           <a:cs typeface="+mn-cs"/>
         </a:defRPr>
@@ -3222,7 +3297,7 @@
           <a:solidFill>
             <a:schemeClr val="tx1"/>
           </a:solidFill>
-          <a:latin typeface="Palatino Linotype" panose="02040502050505030304" pitchFamily="18" charset="0"/>
+          <a:latin typeface="Aptos" panose="020B0004020202020204" pitchFamily="34" charset="0"/>
           <a:ea typeface="+mn-ea"/>
           <a:cs typeface="+mn-cs"/>
         </a:defRPr>
@@ -3611,6 +3686,57 @@
           </a:p>
         </p:txBody>
       </p:sp>
+      <p:sp>
+        <p:nvSpPr>
+          <p:cNvPr id="3" name="Rectangle 2">
+            <a:extLst>
+              <a:ext uri="{FF2B5EF4-FFF2-40B4-BE49-F238E27FC236}">
+                <a16:creationId xmlns:a16="http://schemas.microsoft.com/office/drawing/2014/main" id="{5F20BEE9-A324-ED9D-325B-4217B670B8D1}"/>
+              </a:ext>
+            </a:extLst>
+          </p:cNvPr>
+          <p:cNvSpPr/>
+          <p:nvPr/>
+        </p:nvSpPr>
+        <p:spPr>
+          <a:xfrm>
+            <a:off x="164706" y="353508"/>
+            <a:ext cx="1913992" cy="477078"/>
+          </a:xfrm>
+          <a:prstGeom prst="rect">
+            <a:avLst/>
+          </a:prstGeom>
+        </p:spPr>
+        <p:style>
+          <a:lnRef idx="2">
+            <a:schemeClr val="accent6">
+              <a:shade val="15000"/>
+            </a:schemeClr>
+          </a:lnRef>
+          <a:fillRef idx="1">
+            <a:schemeClr val="accent6"/>
+          </a:fillRef>
+          <a:effectRef idx="0">
+            <a:schemeClr val="accent6"/>
+          </a:effectRef>
+          <a:fontRef idx="minor">
+            <a:schemeClr val="lt1"/>
+          </a:fontRef>
+        </p:style>
+        <p:txBody>
+          <a:bodyPr rtlCol="0" anchor="ctr"/>
+          <a:lstStyle/>
+          <a:p>
+            <a:pPr algn="ctr"/>
+            <a:r>
+              <a:rPr lang="en-US" b="1" dirty="0">
+                <a:latin typeface="Aptos" panose="020B0004020202020204" pitchFamily="34" charset="0"/>
+              </a:rPr>
+              <a:t>BONUS</a:t>
+            </a:r>
+          </a:p>
+        </p:txBody>
+      </p:sp>
     </p:spTree>
     <p:extLst>
       <p:ext uri="{BB962C8B-B14F-4D97-AF65-F5344CB8AC3E}">
@@ -3869,6 +3995,57 @@
                 <a:schemeClr val="tx1"/>
               </a:solidFill>
             </a:endParaRPr>
+          </a:p>
+        </p:txBody>
+      </p:sp>
+      <p:sp>
+        <p:nvSpPr>
+          <p:cNvPr id="6" name="Rectangle 5">
+            <a:extLst>
+              <a:ext uri="{FF2B5EF4-FFF2-40B4-BE49-F238E27FC236}">
+                <a16:creationId xmlns:a16="http://schemas.microsoft.com/office/drawing/2014/main" id="{2AD76DE1-7EE8-6DB3-EA97-3DEC7022F037}"/>
+              </a:ext>
+            </a:extLst>
+          </p:cNvPr>
+          <p:cNvSpPr/>
+          <p:nvPr/>
+        </p:nvSpPr>
+        <p:spPr>
+          <a:xfrm>
+            <a:off x="164706" y="353508"/>
+            <a:ext cx="1913992" cy="477078"/>
+          </a:xfrm>
+          <a:prstGeom prst="rect">
+            <a:avLst/>
+          </a:prstGeom>
+        </p:spPr>
+        <p:style>
+          <a:lnRef idx="2">
+            <a:schemeClr val="accent6">
+              <a:shade val="15000"/>
+            </a:schemeClr>
+          </a:lnRef>
+          <a:fillRef idx="1">
+            <a:schemeClr val="accent6"/>
+          </a:fillRef>
+          <a:effectRef idx="0">
+            <a:schemeClr val="accent6"/>
+          </a:effectRef>
+          <a:fontRef idx="minor">
+            <a:schemeClr val="lt1"/>
+          </a:fontRef>
+        </p:style>
+        <p:txBody>
+          <a:bodyPr rtlCol="0" anchor="ctr"/>
+          <a:lstStyle/>
+          <a:p>
+            <a:pPr algn="ctr"/>
+            <a:r>
+              <a:rPr lang="en-US" b="1" dirty="0">
+                <a:latin typeface="Aptos" panose="020B0004020202020204" pitchFamily="34" charset="0"/>
+              </a:rPr>
+              <a:t>BONUS</a:t>
+            </a:r>
           </a:p>
         </p:txBody>
       </p:sp>
@@ -4217,73 +4394,73 @@
             </a:pPr>
             <a:r>
               <a:rPr lang="it-IT" sz="2200" b="1" dirty="0" err="1">
-                <a:latin typeface="Palatino Linotype" panose="02040502050505030304" pitchFamily="18" charset="0"/>
+                <a:latin typeface="Aptos" panose="020B0004020202020204" pitchFamily="34" charset="0"/>
               </a:rPr>
               <a:t>Example</a:t>
             </a:r>
             <a:r>
               <a:rPr lang="it-IT" sz="2200" dirty="0">
-                <a:latin typeface="Palatino Linotype" panose="02040502050505030304" pitchFamily="18" charset="0"/>
+                <a:latin typeface="Aptos" panose="020B0004020202020204" pitchFamily="34" charset="0"/>
               </a:rPr>
               <a:t>: The app yelp.com </a:t>
             </a:r>
             <a:r>
               <a:rPr lang="it-IT" sz="2200" dirty="0" err="1">
-                <a:latin typeface="Palatino Linotype" panose="02040502050505030304" pitchFamily="18" charset="0"/>
+                <a:latin typeface="Aptos" panose="020B0004020202020204" pitchFamily="34" charset="0"/>
               </a:rPr>
               <a:t>wants</a:t>
             </a:r>
             <a:r>
               <a:rPr lang="it-IT" sz="2200" dirty="0">
-                <a:latin typeface="Palatino Linotype" panose="02040502050505030304" pitchFamily="18" charset="0"/>
+                <a:latin typeface="Aptos" panose="020B0004020202020204" pitchFamily="34" charset="0"/>
               </a:rPr>
               <a:t> to </a:t>
             </a:r>
             <a:r>
               <a:rPr lang="it-IT" sz="2200" dirty="0" err="1">
-                <a:latin typeface="Palatino Linotype" panose="02040502050505030304" pitchFamily="18" charset="0"/>
+                <a:latin typeface="Aptos" panose="020B0004020202020204" pitchFamily="34" charset="0"/>
               </a:rPr>
               <a:t>get</a:t>
             </a:r>
             <a:r>
               <a:rPr lang="it-IT" sz="2200" dirty="0">
-                <a:latin typeface="Palatino Linotype" panose="02040502050505030304" pitchFamily="18" charset="0"/>
+                <a:latin typeface="Aptos" panose="020B0004020202020204" pitchFamily="34" charset="0"/>
               </a:rPr>
               <a:t> access to a </a:t>
             </a:r>
             <a:r>
               <a:rPr lang="it-IT" sz="2200" dirty="0" err="1">
-                <a:latin typeface="Palatino Linotype" panose="02040502050505030304" pitchFamily="18" charset="0"/>
+                <a:latin typeface="Aptos" panose="020B0004020202020204" pitchFamily="34" charset="0"/>
               </a:rPr>
               <a:t>user’s</a:t>
             </a:r>
             <a:r>
               <a:rPr lang="it-IT" sz="2200" dirty="0">
-                <a:latin typeface="Palatino Linotype" panose="02040502050505030304" pitchFamily="18" charset="0"/>
+                <a:latin typeface="Aptos" panose="020B0004020202020204" pitchFamily="34" charset="0"/>
               </a:rPr>
               <a:t> Google account </a:t>
             </a:r>
             <a:r>
               <a:rPr lang="it-IT" sz="2200" dirty="0" err="1">
-                <a:latin typeface="Palatino Linotype" panose="02040502050505030304" pitchFamily="18" charset="0"/>
+                <a:latin typeface="Aptos" panose="020B0004020202020204" pitchFamily="34" charset="0"/>
               </a:rPr>
               <a:t>profile</a:t>
             </a:r>
             <a:r>
               <a:rPr lang="it-IT" sz="2200" dirty="0">
-                <a:latin typeface="Palatino Linotype" panose="02040502050505030304" pitchFamily="18" charset="0"/>
+                <a:latin typeface="Aptos" panose="020B0004020202020204" pitchFamily="34" charset="0"/>
               </a:rPr>
               <a:t> </a:t>
             </a:r>
             <a:r>
               <a:rPr lang="it-IT" sz="2200" dirty="0" err="1">
-                <a:latin typeface="Palatino Linotype" panose="02040502050505030304" pitchFamily="18" charset="0"/>
+                <a:latin typeface="Aptos" panose="020B0004020202020204" pitchFamily="34" charset="0"/>
               </a:rPr>
               <a:t>contacts</a:t>
             </a:r>
             <a:r>
               <a:rPr lang="it-IT" sz="2200" dirty="0">
-                <a:latin typeface="Palatino Linotype" panose="02040502050505030304" pitchFamily="18" charset="0"/>
+                <a:latin typeface="Aptos" panose="020B0004020202020204" pitchFamily="34" charset="0"/>
               </a:rPr>
               <a:t>. </a:t>
             </a:r>
@@ -4335,7 +4512,9 @@
           <a:lstStyle/>
           <a:p>
             <a:pPr algn="ctr"/>
-            <a:endParaRPr lang="it-IT"/>
+            <a:endParaRPr lang="it-IT">
+              <a:latin typeface="Aptos" panose="020B0004020202020204" pitchFamily="34" charset="0"/>
+            </a:endParaRPr>
           </a:p>
         </p:txBody>
       </p:sp>
@@ -4370,13 +4549,13 @@
             <a:pPr algn="ctr"/>
             <a:r>
               <a:rPr lang="it-IT" sz="2200" dirty="0" err="1">
-                <a:latin typeface="Palatino Linotype" panose="02040502050505030304" pitchFamily="18" charset="0"/>
+                <a:latin typeface="Aptos" panose="020B0004020202020204" pitchFamily="34" charset="0"/>
               </a:rPr>
               <a:t>Authorization</a:t>
             </a:r>
             <a:r>
               <a:rPr lang="it-IT" sz="2200" dirty="0">
-                <a:latin typeface="Palatino Linotype" panose="02040502050505030304" pitchFamily="18" charset="0"/>
+                <a:latin typeface="Aptos" panose="020B0004020202020204" pitchFamily="34" charset="0"/>
               </a:rPr>
               <a:t> server</a:t>
             </a:r>
@@ -4414,7 +4593,7 @@
             <a:pPr algn="ctr"/>
             <a:r>
               <a:rPr lang="it-IT" dirty="0">
-                <a:latin typeface="Palatino Linotype" panose="02040502050505030304" pitchFamily="18" charset="0"/>
+                <a:latin typeface="Aptos" panose="020B0004020202020204" pitchFamily="34" charset="0"/>
               </a:rPr>
               <a:t>yelp.com</a:t>
             </a:r>
@@ -4473,7 +4652,7 @@
             <a:pPr algn="ctr"/>
             <a:r>
               <a:rPr lang="it-IT" sz="1600" dirty="0">
-                <a:latin typeface="Palatino Linotype" panose="02040502050505030304" pitchFamily="18" charset="0"/>
+                <a:latin typeface="Aptos" panose="020B0004020202020204" pitchFamily="34" charset="0"/>
               </a:rPr>
               <a:t>Connect with Google</a:t>
             </a:r>
@@ -4547,18 +4726,18 @@
             <a:pPr algn="ctr"/>
             <a:r>
               <a:rPr lang="it-IT" sz="2200" dirty="0">
-                <a:latin typeface="Palatino Linotype" panose="02040502050505030304" pitchFamily="18" charset="0"/>
+                <a:latin typeface="Aptos" panose="020B0004020202020204" pitchFamily="34" charset="0"/>
               </a:rPr>
               <a:t>Resource </a:t>
             </a:r>
             <a:r>
               <a:rPr lang="it-IT" sz="2200" dirty="0" err="1">
-                <a:latin typeface="Palatino Linotype" panose="02040502050505030304" pitchFamily="18" charset="0"/>
+                <a:latin typeface="Aptos" panose="020B0004020202020204" pitchFamily="34" charset="0"/>
               </a:rPr>
               <a:t>owner</a:t>
             </a:r>
             <a:endParaRPr lang="it-IT" sz="2200" dirty="0">
-              <a:latin typeface="Palatino Linotype" panose="02040502050505030304" pitchFamily="18" charset="0"/>
+              <a:latin typeface="Aptos" panose="020B0004020202020204" pitchFamily="34" charset="0"/>
             </a:endParaRPr>
           </a:p>
         </p:txBody>
@@ -4608,7 +4787,9 @@
           <a:lstStyle/>
           <a:p>
             <a:pPr algn="ctr"/>
-            <a:endParaRPr lang="it-IT"/>
+            <a:endParaRPr lang="it-IT">
+              <a:latin typeface="Aptos" panose="020B0004020202020204" pitchFamily="34" charset="0"/>
+            </a:endParaRPr>
           </a:p>
         </p:txBody>
       </p:sp>
@@ -4643,7 +4824,7 @@
             <a:pPr algn="ctr"/>
             <a:r>
               <a:rPr lang="it-IT" dirty="0">
-                <a:latin typeface="Palatino Linotype" panose="02040502050505030304" pitchFamily="18" charset="0"/>
+                <a:latin typeface="Aptos" panose="020B0004020202020204" pitchFamily="34" charset="0"/>
               </a:rPr>
               <a:t>accounts.google.com</a:t>
             </a:r>
@@ -4681,7 +4862,7 @@
             <a:pPr algn="ctr"/>
             <a:r>
               <a:rPr lang="it-IT" sz="2200" dirty="0">
-                <a:latin typeface="Palatino Linotype" panose="02040502050505030304" pitchFamily="18" charset="0"/>
+                <a:latin typeface="Aptos" panose="020B0004020202020204" pitchFamily="34" charset="0"/>
               </a:rPr>
               <a:t>Client</a:t>
             </a:r>
@@ -4740,7 +4921,7 @@
                 <a:solidFill>
                   <a:schemeClr val="tx1"/>
                 </a:solidFill>
-                <a:latin typeface="Palatino Linotype" panose="02040502050505030304" pitchFamily="18" charset="0"/>
+                <a:latin typeface="Aptos" panose="020B0004020202020204" pitchFamily="34" charset="0"/>
               </a:rPr>
               <a:t>Email:</a:t>
             </a:r>
@@ -4799,7 +4980,7 @@
                 <a:solidFill>
                   <a:schemeClr val="tx1"/>
                 </a:solidFill>
-                <a:latin typeface="Palatino Linotype" panose="02040502050505030304" pitchFamily="18" charset="0"/>
+                <a:latin typeface="Aptos" panose="020B0004020202020204" pitchFamily="34" charset="0"/>
               </a:rPr>
               <a:t>Password:</a:t>
             </a:r>
@@ -4883,24 +5064,24 @@
             <a:pPr algn="ctr"/>
             <a:r>
               <a:rPr lang="it-IT" sz="2000" dirty="0" err="1">
-                <a:latin typeface="Palatino Linotype" panose="02040502050505030304" pitchFamily="18" charset="0"/>
+                <a:latin typeface="Aptos" panose="020B0004020202020204" pitchFamily="34" charset="0"/>
               </a:rPr>
               <a:t>Authorization</a:t>
             </a:r>
             <a:r>
               <a:rPr lang="it-IT" sz="2000" dirty="0">
-                <a:latin typeface="Palatino Linotype" panose="02040502050505030304" pitchFamily="18" charset="0"/>
+                <a:latin typeface="Aptos" panose="020B0004020202020204" pitchFamily="34" charset="0"/>
               </a:rPr>
               <a:t> </a:t>
             </a:r>
             <a:r>
               <a:rPr lang="it-IT" sz="2000" dirty="0" err="1">
-                <a:latin typeface="Palatino Linotype" panose="02040502050505030304" pitchFamily="18" charset="0"/>
+                <a:latin typeface="Aptos" panose="020B0004020202020204" pitchFamily="34" charset="0"/>
               </a:rPr>
               <a:t>request</a:t>
             </a:r>
             <a:endParaRPr lang="it-IT" sz="2000" dirty="0">
-              <a:latin typeface="Palatino Linotype" panose="02040502050505030304" pitchFamily="18" charset="0"/>
+              <a:latin typeface="Aptos" panose="020B0004020202020204" pitchFamily="34" charset="0"/>
             </a:endParaRPr>
           </a:p>
         </p:txBody>
@@ -4935,13 +5116,13 @@
           <a:p>
             <a:r>
               <a:rPr lang="it-IT" dirty="0">
-                <a:latin typeface="Palatino Linotype" panose="02040502050505030304" pitchFamily="18" charset="0"/>
+                <a:latin typeface="Aptos" panose="020B0004020202020204" pitchFamily="34" charset="0"/>
               </a:rPr>
               <a:t>Client ID: </a:t>
             </a:r>
             <a:r>
               <a:rPr lang="en-GB" dirty="0">
-                <a:latin typeface="Palatino Linotype" panose="02040502050505030304" pitchFamily="18" charset="0"/>
+                <a:latin typeface="Aptos" panose="020B0004020202020204" pitchFamily="34" charset="0"/>
               </a:rPr>
               <a:t>abc123</a:t>
             </a:r>
@@ -4949,29 +5130,29 @@
           <a:p>
             <a:r>
               <a:rPr lang="en-GB" dirty="0">
-                <a:latin typeface="Palatino Linotype" panose="02040502050505030304" pitchFamily="18" charset="0"/>
+                <a:latin typeface="Aptos" panose="020B0004020202020204" pitchFamily="34" charset="0"/>
               </a:rPr>
               <a:t>Redirect URI: yelp.com/</a:t>
             </a:r>
             <a:r>
               <a:rPr lang="en-GB" dirty="0" err="1">
-                <a:latin typeface="Palatino Linotype" panose="02040502050505030304" pitchFamily="18" charset="0"/>
+                <a:latin typeface="Aptos" panose="020B0004020202020204" pitchFamily="34" charset="0"/>
               </a:rPr>
               <a:t>callback</a:t>
             </a:r>
             <a:endParaRPr lang="en-GB" dirty="0">
-              <a:latin typeface="Palatino Linotype" panose="02040502050505030304" pitchFamily="18" charset="0"/>
+              <a:latin typeface="Aptos" panose="020B0004020202020204" pitchFamily="34" charset="0"/>
             </a:endParaRPr>
           </a:p>
           <a:p>
             <a:r>
               <a:rPr lang="en-GB" dirty="0">
-                <a:latin typeface="Palatino Linotype" panose="02040502050505030304" pitchFamily="18" charset="0"/>
+                <a:latin typeface="Aptos" panose="020B0004020202020204" pitchFamily="34" charset="0"/>
               </a:rPr>
               <a:t>Scope: profile contacts</a:t>
             </a:r>
             <a:endParaRPr lang="it-IT" dirty="0">
-              <a:latin typeface="Palatino Linotype" panose="02040502050505030304" pitchFamily="18" charset="0"/>
+              <a:latin typeface="Aptos" panose="020B0004020202020204" pitchFamily="34" charset="0"/>
             </a:endParaRPr>
           </a:p>
         </p:txBody>
@@ -5007,30 +5188,30 @@
             <a:pPr algn="ctr"/>
             <a:r>
               <a:rPr lang="it-IT" sz="2000" dirty="0">
-                <a:latin typeface="Palatino Linotype" panose="02040502050505030304" pitchFamily="18" charset="0"/>
+                <a:latin typeface="Aptos" panose="020B0004020202020204" pitchFamily="34" charset="0"/>
               </a:rPr>
               <a:t>Authentication of the </a:t>
             </a:r>
             <a:r>
               <a:rPr lang="it-IT" sz="2000" dirty="0" err="1">
-                <a:latin typeface="Palatino Linotype" panose="02040502050505030304" pitchFamily="18" charset="0"/>
+                <a:latin typeface="Aptos" panose="020B0004020202020204" pitchFamily="34" charset="0"/>
               </a:rPr>
               <a:t>resource</a:t>
             </a:r>
             <a:r>
               <a:rPr lang="it-IT" sz="2000" dirty="0">
-                <a:latin typeface="Palatino Linotype" panose="02040502050505030304" pitchFamily="18" charset="0"/>
+                <a:latin typeface="Aptos" panose="020B0004020202020204" pitchFamily="34" charset="0"/>
               </a:rPr>
               <a:t> </a:t>
             </a:r>
             <a:r>
               <a:rPr lang="it-IT" sz="2000" dirty="0" err="1">
-                <a:latin typeface="Palatino Linotype" panose="02040502050505030304" pitchFamily="18" charset="0"/>
+                <a:latin typeface="Aptos" panose="020B0004020202020204" pitchFamily="34" charset="0"/>
               </a:rPr>
               <a:t>owner</a:t>
             </a:r>
             <a:endParaRPr lang="it-IT" sz="2000" dirty="0">
-              <a:latin typeface="Palatino Linotype" panose="02040502050505030304" pitchFamily="18" charset="0"/>
+              <a:latin typeface="Aptos" panose="020B0004020202020204" pitchFamily="34" charset="0"/>
             </a:endParaRPr>
           </a:p>
         </p:txBody>
@@ -5080,7 +5261,9 @@
           <a:lstStyle/>
           <a:p>
             <a:pPr algn="ctr"/>
-            <a:endParaRPr lang="it-IT"/>
+            <a:endParaRPr lang="it-IT">
+              <a:latin typeface="Aptos" panose="020B0004020202020204" pitchFamily="34" charset="0"/>
+            </a:endParaRPr>
           </a:p>
         </p:txBody>
       </p:sp>
@@ -5161,7 +5344,7 @@
             <a:pPr algn="ctr"/>
             <a:r>
               <a:rPr lang="it-IT" dirty="0">
-                <a:latin typeface="Palatino Linotype" panose="02040502050505030304" pitchFamily="18" charset="0"/>
+                <a:latin typeface="Aptos" panose="020B0004020202020204" pitchFamily="34" charset="0"/>
               </a:rPr>
               <a:t>accounts.google.com</a:t>
             </a:r>
@@ -5199,61 +5382,61 @@
             <a:pPr algn="ctr"/>
             <a:r>
               <a:rPr lang="it-IT" sz="1400" dirty="0" err="1">
-                <a:latin typeface="Palatino Linotype" panose="02040502050505030304" pitchFamily="18" charset="0"/>
+                <a:latin typeface="Aptos" panose="020B0004020202020204" pitchFamily="34" charset="0"/>
               </a:rPr>
               <a:t>Allow</a:t>
             </a:r>
             <a:r>
               <a:rPr lang="it-IT" sz="1400" dirty="0">
-                <a:latin typeface="Palatino Linotype" panose="02040502050505030304" pitchFamily="18" charset="0"/>
+                <a:latin typeface="Aptos" panose="020B0004020202020204" pitchFamily="34" charset="0"/>
               </a:rPr>
               <a:t> </a:t>
             </a:r>
             <a:r>
               <a:rPr lang="it-IT" sz="1400" dirty="0" err="1">
-                <a:latin typeface="Palatino Linotype" panose="02040502050505030304" pitchFamily="18" charset="0"/>
+                <a:latin typeface="Aptos" panose="020B0004020202020204" pitchFamily="34" charset="0"/>
               </a:rPr>
               <a:t>Yelp</a:t>
             </a:r>
             <a:r>
               <a:rPr lang="it-IT" sz="1400" dirty="0">
-                <a:latin typeface="Palatino Linotype" panose="02040502050505030304" pitchFamily="18" charset="0"/>
+                <a:latin typeface="Aptos" panose="020B0004020202020204" pitchFamily="34" charset="0"/>
               </a:rPr>
               <a:t> to access </a:t>
             </a:r>
             <a:r>
               <a:rPr lang="it-IT" sz="1400" dirty="0" err="1">
-                <a:latin typeface="Palatino Linotype" panose="02040502050505030304" pitchFamily="18" charset="0"/>
+                <a:latin typeface="Aptos" panose="020B0004020202020204" pitchFamily="34" charset="0"/>
               </a:rPr>
               <a:t>your</a:t>
             </a:r>
             <a:r>
               <a:rPr lang="it-IT" sz="1400" dirty="0">
-                <a:latin typeface="Palatino Linotype" panose="02040502050505030304" pitchFamily="18" charset="0"/>
+                <a:latin typeface="Aptos" panose="020B0004020202020204" pitchFamily="34" charset="0"/>
               </a:rPr>
               <a:t> </a:t>
             </a:r>
             <a:r>
               <a:rPr lang="it-IT" sz="1400" dirty="0" err="1">
-                <a:latin typeface="Palatino Linotype" panose="02040502050505030304" pitchFamily="18" charset="0"/>
+                <a:latin typeface="Aptos" panose="020B0004020202020204" pitchFamily="34" charset="0"/>
               </a:rPr>
               <a:t>profile</a:t>
             </a:r>
             <a:r>
               <a:rPr lang="it-IT" sz="1400" dirty="0">
-                <a:latin typeface="Palatino Linotype" panose="02040502050505030304" pitchFamily="18" charset="0"/>
+                <a:latin typeface="Aptos" panose="020B0004020202020204" pitchFamily="34" charset="0"/>
               </a:rPr>
               <a:t> and </a:t>
             </a:r>
             <a:r>
               <a:rPr lang="it-IT" sz="1400" dirty="0" err="1">
-                <a:latin typeface="Palatino Linotype" panose="02040502050505030304" pitchFamily="18" charset="0"/>
+                <a:latin typeface="Aptos" panose="020B0004020202020204" pitchFamily="34" charset="0"/>
               </a:rPr>
               <a:t>contacts</a:t>
             </a:r>
             <a:r>
               <a:rPr lang="it-IT" sz="1400" dirty="0">
-                <a:latin typeface="Palatino Linotype" panose="02040502050505030304" pitchFamily="18" charset="0"/>
+                <a:latin typeface="Aptos" panose="020B0004020202020204" pitchFamily="34" charset="0"/>
               </a:rPr>
               <a:t>?</a:t>
             </a:r>
@@ -5312,7 +5495,7 @@
             <a:pPr algn="ctr"/>
             <a:r>
               <a:rPr lang="it-IT" sz="1600" dirty="0">
-                <a:latin typeface="Palatino Linotype" panose="02040502050505030304" pitchFamily="18" charset="0"/>
+                <a:latin typeface="Aptos" panose="020B0004020202020204" pitchFamily="34" charset="0"/>
               </a:rPr>
               <a:t>Yes</a:t>
             </a:r>
@@ -5372,7 +5555,7 @@
                 <a:solidFill>
                   <a:schemeClr val="tx1"/>
                 </a:solidFill>
-                <a:latin typeface="Palatino Linotype" panose="02040502050505030304" pitchFamily="18" charset="0"/>
+                <a:latin typeface="Aptos" panose="020B0004020202020204" pitchFamily="34" charset="0"/>
               </a:rPr>
               <a:t>No</a:t>
             </a:r>
@@ -5410,48 +5593,48 @@
             <a:pPr algn="ctr"/>
             <a:r>
               <a:rPr lang="it-IT" sz="2000" dirty="0" err="1">
-                <a:latin typeface="Palatino Linotype" panose="02040502050505030304" pitchFamily="18" charset="0"/>
+                <a:latin typeface="Aptos" panose="020B0004020202020204" pitchFamily="34" charset="0"/>
               </a:rPr>
               <a:t>Request</a:t>
             </a:r>
             <a:r>
               <a:rPr lang="it-IT" sz="2000" dirty="0">
-                <a:latin typeface="Palatino Linotype" panose="02040502050505030304" pitchFamily="18" charset="0"/>
+                <a:latin typeface="Aptos" panose="020B0004020202020204" pitchFamily="34" charset="0"/>
               </a:rPr>
               <a:t> </a:t>
             </a:r>
             <a:r>
               <a:rPr lang="it-IT" sz="2000" dirty="0" err="1">
-                <a:latin typeface="Palatino Linotype" panose="02040502050505030304" pitchFamily="18" charset="0"/>
+                <a:latin typeface="Aptos" panose="020B0004020202020204" pitchFamily="34" charset="0"/>
               </a:rPr>
               <a:t>consent</a:t>
             </a:r>
             <a:r>
               <a:rPr lang="it-IT" sz="2000" dirty="0">
-                <a:latin typeface="Palatino Linotype" panose="02040502050505030304" pitchFamily="18" charset="0"/>
+                <a:latin typeface="Aptos" panose="020B0004020202020204" pitchFamily="34" charset="0"/>
               </a:rPr>
               <a:t> from the </a:t>
             </a:r>
             <a:r>
               <a:rPr lang="it-IT" sz="2000" dirty="0" err="1">
-                <a:latin typeface="Palatino Linotype" panose="02040502050505030304" pitchFamily="18" charset="0"/>
+                <a:latin typeface="Aptos" panose="020B0004020202020204" pitchFamily="34" charset="0"/>
               </a:rPr>
               <a:t>resource</a:t>
             </a:r>
             <a:r>
               <a:rPr lang="it-IT" sz="2000" dirty="0">
-                <a:latin typeface="Palatino Linotype" panose="02040502050505030304" pitchFamily="18" charset="0"/>
+                <a:latin typeface="Aptos" panose="020B0004020202020204" pitchFamily="34" charset="0"/>
               </a:rPr>
               <a:t> </a:t>
             </a:r>
             <a:r>
               <a:rPr lang="it-IT" sz="2000" dirty="0" err="1">
-                <a:latin typeface="Palatino Linotype" panose="02040502050505030304" pitchFamily="18" charset="0"/>
+                <a:latin typeface="Aptos" panose="020B0004020202020204" pitchFamily="34" charset="0"/>
               </a:rPr>
               <a:t>owner</a:t>
             </a:r>
             <a:endParaRPr lang="it-IT" sz="2000" dirty="0">
-              <a:latin typeface="Palatino Linotype" panose="02040502050505030304" pitchFamily="18" charset="0"/>
+              <a:latin typeface="Aptos" panose="020B0004020202020204" pitchFamily="34" charset="0"/>
             </a:endParaRPr>
           </a:p>
         </p:txBody>
@@ -5545,7 +5728,9 @@
           <a:lstStyle/>
           <a:p>
             <a:pPr algn="ctr"/>
-            <a:endParaRPr lang="it-IT"/>
+            <a:endParaRPr lang="it-IT">
+              <a:latin typeface="Aptos" panose="020B0004020202020204" pitchFamily="34" charset="0"/>
+            </a:endParaRPr>
           </a:p>
         </p:txBody>
       </p:sp>
@@ -5580,18 +5765,18 @@
             <a:pPr algn="ctr"/>
             <a:r>
               <a:rPr lang="it-IT" dirty="0">
-                <a:latin typeface="Palatino Linotype" panose="02040502050505030304" pitchFamily="18" charset="0"/>
+                <a:latin typeface="Aptos" panose="020B0004020202020204" pitchFamily="34" charset="0"/>
               </a:rPr>
               <a:t>yelp.com/</a:t>
             </a:r>
             <a:r>
               <a:rPr lang="it-IT" dirty="0" err="1">
-                <a:latin typeface="Palatino Linotype" panose="02040502050505030304" pitchFamily="18" charset="0"/>
+                <a:latin typeface="Aptos" panose="020B0004020202020204" pitchFamily="34" charset="0"/>
               </a:rPr>
               <a:t>callback</a:t>
             </a:r>
             <a:endParaRPr lang="it-IT" dirty="0">
-              <a:latin typeface="Palatino Linotype" panose="02040502050505030304" pitchFamily="18" charset="0"/>
+              <a:latin typeface="Aptos" panose="020B0004020202020204" pitchFamily="34" charset="0"/>
             </a:endParaRPr>
           </a:p>
         </p:txBody>
@@ -5627,31 +5812,31 @@
             <a:pPr algn="ctr"/>
             <a:r>
               <a:rPr lang="it-IT" sz="2000" dirty="0">
-                <a:latin typeface="Palatino Linotype" panose="02040502050505030304" pitchFamily="18" charset="0"/>
+                <a:latin typeface="Aptos" panose="020B0004020202020204" pitchFamily="34" charset="0"/>
               </a:rPr>
               <a:t>Back to the </a:t>
             </a:r>
             <a:r>
               <a:rPr lang="it-IT" sz="2000" dirty="0" err="1">
-                <a:latin typeface="Palatino Linotype" panose="02040502050505030304" pitchFamily="18" charset="0"/>
+                <a:latin typeface="Aptos" panose="020B0004020202020204" pitchFamily="34" charset="0"/>
               </a:rPr>
               <a:t>redirect</a:t>
             </a:r>
             <a:r>
               <a:rPr lang="it-IT" sz="2000" dirty="0">
-                <a:latin typeface="Palatino Linotype" panose="02040502050505030304" pitchFamily="18" charset="0"/>
+                <a:latin typeface="Aptos" panose="020B0004020202020204" pitchFamily="34" charset="0"/>
               </a:rPr>
               <a:t> URI with the </a:t>
             </a:r>
             <a:r>
               <a:rPr lang="it-IT" sz="2000" dirty="0" err="1">
-                <a:latin typeface="Palatino Linotype" panose="02040502050505030304" pitchFamily="18" charset="0"/>
+                <a:latin typeface="Aptos" panose="020B0004020202020204" pitchFamily="34" charset="0"/>
               </a:rPr>
               <a:t>authorization</a:t>
             </a:r>
             <a:r>
               <a:rPr lang="it-IT" sz="2000" dirty="0">
-                <a:latin typeface="Palatino Linotype" panose="02040502050505030304" pitchFamily="18" charset="0"/>
+                <a:latin typeface="Aptos" panose="020B0004020202020204" pitchFamily="34" charset="0"/>
               </a:rPr>
               <a:t> code</a:t>
             </a:r>
@@ -5689,7 +5874,7 @@
             <a:pPr algn="ctr"/>
             <a:r>
               <a:rPr lang="it-IT" dirty="0">
-                <a:latin typeface="Palatino Linotype" panose="02040502050505030304" pitchFamily="18" charset="0"/>
+                <a:latin typeface="Aptos" panose="020B0004020202020204" pitchFamily="34" charset="0"/>
               </a:rPr>
               <a:t>Loading</a:t>
             </a:r>
@@ -5810,7 +5995,7 @@
                 <a:solidFill>
                   <a:srgbClr val="FF0000"/>
                 </a:solidFill>
-                <a:latin typeface="Palatino Linotype" panose="02040502050505030304" pitchFamily="18" charset="0"/>
+                <a:latin typeface="Aptos" panose="020B0004020202020204" pitchFamily="34" charset="0"/>
               </a:rPr>
               <a:t>Authorization</a:t>
             </a:r>
@@ -5819,7 +6004,7 @@
                 <a:solidFill>
                   <a:srgbClr val="FF0000"/>
                 </a:solidFill>
-                <a:latin typeface="Palatino Linotype" panose="02040502050505030304" pitchFamily="18" charset="0"/>
+                <a:latin typeface="Aptos" panose="020B0004020202020204" pitchFamily="34" charset="0"/>
               </a:rPr>
               <a:t> code, client ID, client secret</a:t>
             </a:r>
@@ -5904,7 +6089,7 @@
                 <a:solidFill>
                   <a:srgbClr val="0070C0"/>
                 </a:solidFill>
-                <a:latin typeface="Palatino Linotype" panose="02040502050505030304" pitchFamily="18" charset="0"/>
+                <a:latin typeface="Aptos" panose="020B0004020202020204" pitchFamily="34" charset="0"/>
               </a:rPr>
               <a:t>Access token</a:t>
             </a:r>
@@ -5956,7 +6141,9 @@
           <a:lstStyle/>
           <a:p>
             <a:pPr algn="ctr"/>
-            <a:endParaRPr lang="it-IT"/>
+            <a:endParaRPr lang="it-IT">
+              <a:latin typeface="Aptos" panose="020B0004020202020204" pitchFamily="34" charset="0"/>
+            </a:endParaRPr>
           </a:p>
         </p:txBody>
       </p:sp>
@@ -5991,7 +6178,7 @@
             <a:pPr algn="ctr"/>
             <a:r>
               <a:rPr lang="it-IT" dirty="0">
-                <a:latin typeface="Palatino Linotype" panose="02040502050505030304" pitchFamily="18" charset="0"/>
+                <a:latin typeface="Aptos" panose="020B0004020202020204" pitchFamily="34" charset="0"/>
               </a:rPr>
               <a:t>contacts.google.com</a:t>
             </a:r>
@@ -6117,7 +6304,7 @@
             <a:pPr algn="ctr"/>
             <a:r>
               <a:rPr lang="it-IT" sz="2000" dirty="0">
-                <a:latin typeface="Palatino Linotype" panose="02040502050505030304" pitchFamily="18" charset="0"/>
+                <a:latin typeface="Aptos" panose="020B0004020202020204" pitchFamily="34" charset="0"/>
               </a:rPr>
               <a:t>Access token</a:t>
             </a:r>
@@ -6155,13 +6342,64 @@
             <a:pPr algn="ctr"/>
             <a:r>
               <a:rPr lang="it-IT" sz="2000" dirty="0" err="1">
-                <a:latin typeface="Palatino Linotype" panose="02040502050505030304" pitchFamily="18" charset="0"/>
+                <a:latin typeface="Aptos" panose="020B0004020202020204" pitchFamily="34" charset="0"/>
               </a:rPr>
               <a:t>Contacts</a:t>
             </a:r>
             <a:endParaRPr lang="it-IT" sz="2000" dirty="0">
-              <a:latin typeface="Palatino Linotype" panose="02040502050505030304" pitchFamily="18" charset="0"/>
+              <a:latin typeface="Aptos" panose="020B0004020202020204" pitchFamily="34" charset="0"/>
             </a:endParaRPr>
+          </a:p>
+        </p:txBody>
+      </p:sp>
+      <p:sp>
+        <p:nvSpPr>
+          <p:cNvPr id="7" name="Rectangle 6">
+            <a:extLst>
+              <a:ext uri="{FF2B5EF4-FFF2-40B4-BE49-F238E27FC236}">
+                <a16:creationId xmlns:a16="http://schemas.microsoft.com/office/drawing/2014/main" id="{C4D1B175-9520-EF06-F187-25AFA8EDB860}"/>
+              </a:ext>
+            </a:extLst>
+          </p:cNvPr>
+          <p:cNvSpPr/>
+          <p:nvPr/>
+        </p:nvSpPr>
+        <p:spPr>
+          <a:xfrm>
+            <a:off x="164706" y="353508"/>
+            <a:ext cx="1115454" cy="477078"/>
+          </a:xfrm>
+          <a:prstGeom prst="rect">
+            <a:avLst/>
+          </a:prstGeom>
+        </p:spPr>
+        <p:style>
+          <a:lnRef idx="2">
+            <a:schemeClr val="accent6">
+              <a:shade val="15000"/>
+            </a:schemeClr>
+          </a:lnRef>
+          <a:fillRef idx="1">
+            <a:schemeClr val="accent6"/>
+          </a:fillRef>
+          <a:effectRef idx="0">
+            <a:schemeClr val="accent6"/>
+          </a:effectRef>
+          <a:fontRef idx="minor">
+            <a:schemeClr val="lt1"/>
+          </a:fontRef>
+        </p:style>
+        <p:txBody>
+          <a:bodyPr rtlCol="0" anchor="ctr"/>
+          <a:lstStyle/>
+          <a:p>
+            <a:pPr algn="ctr"/>
+            <a:r>
+              <a:rPr lang="en-US" b="1" dirty="0">
+                <a:latin typeface="Aptos" panose="020B0004020202020204" pitchFamily="34" charset="0"/>
+              </a:rPr>
+              <a:t>BONUS</a:t>
+            </a:r>
           </a:p>
         </p:txBody>
       </p:sp>
@@ -7721,7 +7959,6 @@
                 <a:solidFill>
                   <a:srgbClr val="C7254E"/>
                 </a:solidFill>
-                <a:latin typeface="Roboto Mono"/>
               </a:rPr>
               <a:t>					</a:t>
             </a:r>
@@ -7730,14 +7967,11 @@
                 <a:solidFill>
                   <a:srgbClr val="C7254E"/>
                 </a:solidFill>
-                <a:latin typeface="Roboto Mono"/>
               </a:rPr>
               <a:t>xxxxx</a:t>
             </a:r>
             <a:r>
-              <a:rPr lang="en-US" altLang="en-US" dirty="0" err="1">
-                <a:latin typeface="Roboto Mono"/>
-              </a:rPr>
+              <a:rPr lang="en-US" altLang="en-US" dirty="0" err="1"/>
               <a:t>.</a:t>
             </a:r>
             <a:r>
@@ -7745,14 +7979,11 @@
                 <a:solidFill>
                   <a:srgbClr val="00B050"/>
                 </a:solidFill>
-                <a:latin typeface="Roboto Mono"/>
               </a:rPr>
               <a:t>yyyyy</a:t>
             </a:r>
             <a:r>
-              <a:rPr lang="en-US" altLang="en-US" dirty="0" err="1">
-                <a:latin typeface="Roboto Mono"/>
-              </a:rPr>
+              <a:rPr lang="en-US" altLang="en-US" dirty="0" err="1"/>
               <a:t>.</a:t>
             </a:r>
             <a:r>
@@ -7760,7 +7991,6 @@
                 <a:solidFill>
                   <a:srgbClr val="0070C0"/>
                 </a:solidFill>
-                <a:latin typeface="Roboto Mono"/>
               </a:rPr>
               <a:t>zzzzz</a:t>
             </a:r>
@@ -7768,7 +7998,6 @@
               <a:solidFill>
                 <a:srgbClr val="0070C0"/>
               </a:solidFill>
-              <a:latin typeface="Arial" panose="020B0604020202020204" pitchFamily="34" charset="0"/>
             </a:endParaRPr>
           </a:p>
           <a:p>
@@ -7808,7 +8037,7 @@
         <p:spPr>
           <a:xfrm>
             <a:off x="1271131" y="4650316"/>
-            <a:ext cx="7776488" cy="1477328"/>
+            <a:ext cx="7398307" cy="1477328"/>
           </a:xfrm>
           <a:prstGeom prst="rect">
             <a:avLst/>
@@ -7828,60 +8057,60 @@
                 <a:solidFill>
                   <a:srgbClr val="C00000"/>
                 </a:solidFill>
-                <a:latin typeface="Palatino Linotype" panose="02040502050505030304" pitchFamily="18" charset="0"/>
+                <a:latin typeface="Aptos" panose="020B0004020202020204" pitchFamily="34" charset="0"/>
               </a:rPr>
               <a:t>Header</a:t>
             </a:r>
             <a:r>
               <a:rPr lang="it-IT" sz="2400" dirty="0">
-                <a:latin typeface="Palatino Linotype" panose="02040502050505030304" pitchFamily="18" charset="0"/>
+                <a:latin typeface="Aptos" panose="020B0004020202020204" pitchFamily="34" charset="0"/>
               </a:rPr>
               <a:t>: the </a:t>
             </a:r>
             <a:r>
               <a:rPr lang="it-IT" sz="2400" dirty="0" err="1">
-                <a:latin typeface="Palatino Linotype" panose="02040502050505030304" pitchFamily="18" charset="0"/>
+                <a:latin typeface="Aptos" panose="020B0004020202020204" pitchFamily="34" charset="0"/>
               </a:rPr>
               <a:t>type</a:t>
             </a:r>
             <a:r>
               <a:rPr lang="it-IT" sz="2400" dirty="0">
-                <a:latin typeface="Palatino Linotype" panose="02040502050505030304" pitchFamily="18" charset="0"/>
+                <a:latin typeface="Aptos" panose="020B0004020202020204" pitchFamily="34" charset="0"/>
               </a:rPr>
               <a:t> of the </a:t>
             </a:r>
             <a:r>
               <a:rPr lang="it-IT" sz="2400" dirty="0" err="1">
-                <a:latin typeface="Palatino Linotype" panose="02040502050505030304" pitchFamily="18" charset="0"/>
+                <a:latin typeface="Aptos" panose="020B0004020202020204" pitchFamily="34" charset="0"/>
               </a:rPr>
               <a:t>token</a:t>
             </a:r>
             <a:r>
               <a:rPr lang="it-IT" sz="2400" dirty="0">
-                <a:latin typeface="Palatino Linotype" panose="02040502050505030304" pitchFamily="18" charset="0"/>
+                <a:latin typeface="Aptos" panose="020B0004020202020204" pitchFamily="34" charset="0"/>
               </a:rPr>
               <a:t> and the </a:t>
             </a:r>
             <a:r>
               <a:rPr lang="it-IT" sz="2400" dirty="0" err="1">
-                <a:latin typeface="Palatino Linotype" panose="02040502050505030304" pitchFamily="18" charset="0"/>
+                <a:latin typeface="Aptos" panose="020B0004020202020204" pitchFamily="34" charset="0"/>
               </a:rPr>
               <a:t>signing</a:t>
             </a:r>
             <a:r>
               <a:rPr lang="it-IT" sz="2400" dirty="0">
-                <a:latin typeface="Palatino Linotype" panose="02040502050505030304" pitchFamily="18" charset="0"/>
+                <a:latin typeface="Aptos" panose="020B0004020202020204" pitchFamily="34" charset="0"/>
               </a:rPr>
               <a:t> </a:t>
             </a:r>
             <a:r>
               <a:rPr lang="it-IT" sz="2400" dirty="0" err="1">
-                <a:latin typeface="Palatino Linotype" panose="02040502050505030304" pitchFamily="18" charset="0"/>
+                <a:latin typeface="Aptos" panose="020B0004020202020204" pitchFamily="34" charset="0"/>
               </a:rPr>
               <a:t>algorithm</a:t>
             </a:r>
             <a:endParaRPr lang="it-IT" sz="2400" dirty="0">
-              <a:latin typeface="Palatino Linotype" panose="02040502050505030304" pitchFamily="18" charset="0"/>
+              <a:latin typeface="Aptos" panose="020B0004020202020204" pitchFamily="34" charset="0"/>
             </a:endParaRPr>
           </a:p>
           <a:p>
@@ -7889,7 +8118,7 @@
               <a:defRPr/>
             </a:pPr>
             <a:endParaRPr lang="it-IT" sz="2400" dirty="0">
-              <a:latin typeface="Palatino Linotype" panose="02040502050505030304" pitchFamily="18" charset="0"/>
+              <a:latin typeface="Aptos" panose="020B0004020202020204" pitchFamily="34" charset="0"/>
             </a:endParaRPr>
           </a:p>
           <a:p>
@@ -7898,31 +8127,31 @@
             </a:pPr>
             <a:r>
               <a:rPr lang="en-GB" sz="2400" dirty="0">
-                <a:latin typeface="Palatino Linotype" panose="02040502050505030304" pitchFamily="18" charset="0"/>
+                <a:latin typeface="Aptos" panose="020B0004020202020204" pitchFamily="34" charset="0"/>
               </a:rPr>
               <a:t>{ "</a:t>
             </a:r>
             <a:r>
               <a:rPr lang="en-GB" sz="2400" dirty="0" err="1">
-                <a:latin typeface="Palatino Linotype" panose="02040502050505030304" pitchFamily="18" charset="0"/>
+                <a:latin typeface="Aptos" panose="020B0004020202020204" pitchFamily="34" charset="0"/>
               </a:rPr>
               <a:t>alg</a:t>
             </a:r>
             <a:r>
               <a:rPr lang="en-GB" sz="2400" dirty="0">
-                <a:latin typeface="Palatino Linotype" panose="02040502050505030304" pitchFamily="18" charset="0"/>
+                <a:latin typeface="Aptos" panose="020B0004020202020204" pitchFamily="34" charset="0"/>
               </a:rPr>
               <a:t>": “RS256", "</a:t>
             </a:r>
             <a:r>
               <a:rPr lang="en-GB" sz="2400" dirty="0" err="1">
-                <a:latin typeface="Palatino Linotype" panose="02040502050505030304" pitchFamily="18" charset="0"/>
+                <a:latin typeface="Aptos" panose="020B0004020202020204" pitchFamily="34" charset="0"/>
               </a:rPr>
               <a:t>typ</a:t>
             </a:r>
             <a:r>
               <a:rPr lang="en-GB" sz="2400" dirty="0">
-                <a:latin typeface="Palatino Linotype" panose="02040502050505030304" pitchFamily="18" charset="0"/>
+                <a:latin typeface="Aptos" panose="020B0004020202020204" pitchFamily="34" charset="0"/>
               </a:rPr>
               <a:t>": "JWT" }</a:t>
             </a:r>
@@ -7932,7 +8161,7 @@
               <a:defRPr/>
             </a:pPr>
             <a:endParaRPr lang="it-IT" dirty="0">
-              <a:latin typeface="Palatino Linotype" panose="02040502050505030304" pitchFamily="18" charset="0"/>
+              <a:latin typeface="Aptos" panose="020B0004020202020204" pitchFamily="34" charset="0"/>
             </a:endParaRPr>
           </a:p>
         </p:txBody>
@@ -7940,13 +8169,15 @@
       <p:cxnSp>
         <p:nvCxnSpPr>
           <p:cNvPr id="9" name="Connettore 2 8"/>
-          <p:cNvCxnSpPr/>
+          <p:cNvCxnSpPr>
+            <a:cxnSpLocks/>
+          </p:cNvCxnSpPr>
           <p:nvPr/>
         </p:nvCxnSpPr>
         <p:spPr>
           <a:xfrm flipH="1">
-            <a:off x="5159375" y="4056807"/>
-            <a:ext cx="318408" cy="501783"/>
+            <a:off x="5159375" y="3730336"/>
+            <a:ext cx="233507" cy="828254"/>
           </a:xfrm>
           <a:prstGeom prst="straightConnector1">
             <a:avLst/>
@@ -8266,7 +8497,6 @@
                 <a:solidFill>
                   <a:srgbClr val="C7254E"/>
                 </a:solidFill>
-                <a:latin typeface="Roboto Mono"/>
               </a:rPr>
               <a:t>	</a:t>
             </a:r>
@@ -8275,14 +8505,11 @@
                 <a:solidFill>
                   <a:srgbClr val="C7254E"/>
                 </a:solidFill>
-                <a:latin typeface="Roboto Mono"/>
               </a:rPr>
               <a:t>xxxxx</a:t>
             </a:r>
             <a:r>
-              <a:rPr lang="en-US" altLang="en-US" dirty="0" err="1">
-                <a:latin typeface="Roboto Mono"/>
-              </a:rPr>
+              <a:rPr lang="en-US" altLang="en-US" dirty="0" err="1"/>
               <a:t>.</a:t>
             </a:r>
             <a:r>
@@ -8290,14 +8517,11 @@
                 <a:solidFill>
                   <a:srgbClr val="00B050"/>
                 </a:solidFill>
-                <a:latin typeface="Roboto Mono"/>
               </a:rPr>
               <a:t>yyyyy</a:t>
             </a:r>
             <a:r>
-              <a:rPr lang="en-US" altLang="en-US" dirty="0" err="1">
-                <a:latin typeface="Roboto Mono"/>
-              </a:rPr>
+              <a:rPr lang="en-US" altLang="en-US" dirty="0" err="1"/>
               <a:t>.</a:t>
             </a:r>
             <a:r>
@@ -8305,7 +8529,6 @@
                 <a:solidFill>
                   <a:srgbClr val="0070C0"/>
                 </a:solidFill>
-                <a:latin typeface="Roboto Mono"/>
               </a:rPr>
               <a:t>zzzzz</a:t>
             </a:r>
@@ -8313,7 +8536,6 @@
               <a:solidFill>
                 <a:srgbClr val="0070C0"/>
               </a:solidFill>
-              <a:latin typeface="Arial" panose="020B0604020202020204" pitchFamily="34" charset="0"/>
             </a:endParaRPr>
           </a:p>
           <a:p>
@@ -8347,61 +8569,61 @@
                 <a:solidFill>
                   <a:srgbClr val="00B050"/>
                 </a:solidFill>
-                <a:latin typeface="Palatino Linotype" panose="02040502050505030304" pitchFamily="18" charset="0"/>
+                <a:latin typeface="Aptos" panose="020B0004020202020204" pitchFamily="34" charset="0"/>
               </a:rPr>
               <a:t>Payload</a:t>
             </a:r>
             <a:r>
               <a:rPr lang="it-IT" sz="2400" dirty="0">
-                <a:latin typeface="Palatino Linotype" panose="02040502050505030304" pitchFamily="18" charset="0"/>
+                <a:latin typeface="Aptos" panose="020B0004020202020204" pitchFamily="34" charset="0"/>
               </a:rPr>
               <a:t>: </a:t>
             </a:r>
             <a:r>
               <a:rPr lang="it-IT" sz="2400" dirty="0" err="1">
-                <a:latin typeface="Palatino Linotype" panose="02040502050505030304" pitchFamily="18" charset="0"/>
+                <a:latin typeface="Aptos" panose="020B0004020202020204" pitchFamily="34" charset="0"/>
               </a:rPr>
               <a:t>it</a:t>
             </a:r>
             <a:r>
               <a:rPr lang="it-IT" sz="2400" dirty="0">
-                <a:latin typeface="Palatino Linotype" panose="02040502050505030304" pitchFamily="18" charset="0"/>
+                <a:latin typeface="Aptos" panose="020B0004020202020204" pitchFamily="34" charset="0"/>
               </a:rPr>
               <a:t> </a:t>
             </a:r>
             <a:r>
               <a:rPr lang="it-IT" sz="2400" dirty="0" err="1">
-                <a:latin typeface="Palatino Linotype" panose="02040502050505030304" pitchFamily="18" charset="0"/>
+                <a:latin typeface="Aptos" panose="020B0004020202020204" pitchFamily="34" charset="0"/>
               </a:rPr>
               <a:t>contains</a:t>
             </a:r>
             <a:r>
               <a:rPr lang="it-IT" sz="2400" dirty="0">
-                <a:latin typeface="Palatino Linotype" panose="02040502050505030304" pitchFamily="18" charset="0"/>
+                <a:latin typeface="Aptos" panose="020B0004020202020204" pitchFamily="34" charset="0"/>
               </a:rPr>
               <a:t> </a:t>
             </a:r>
             <a:r>
               <a:rPr lang="it-IT" sz="2400" dirty="0" err="1">
-                <a:latin typeface="Palatino Linotype" panose="02040502050505030304" pitchFamily="18" charset="0"/>
+                <a:latin typeface="Aptos" panose="020B0004020202020204" pitchFamily="34" charset="0"/>
               </a:rPr>
               <a:t>claims</a:t>
             </a:r>
             <a:r>
               <a:rPr lang="it-IT" sz="2400" dirty="0">
-                <a:latin typeface="Palatino Linotype" panose="02040502050505030304" pitchFamily="18" charset="0"/>
+                <a:latin typeface="Aptos" panose="020B0004020202020204" pitchFamily="34" charset="0"/>
               </a:rPr>
               <a:t>, i.e., some </a:t>
             </a:r>
             <a:r>
               <a:rPr lang="it-IT" sz="2400" dirty="0" err="1">
-                <a:latin typeface="Palatino Linotype" panose="02040502050505030304" pitchFamily="18" charset="0"/>
+                <a:latin typeface="Aptos" panose="020B0004020202020204" pitchFamily="34" charset="0"/>
               </a:rPr>
               <a:t>statements</a:t>
             </a:r>
             <a:r>
               <a:rPr lang="it-IT" sz="2400" dirty="0">
-                <a:latin typeface="Palatino Linotype" panose="02040502050505030304" pitchFamily="18" charset="0"/>
+                <a:latin typeface="Aptos" panose="020B0004020202020204" pitchFamily="34" charset="0"/>
               </a:rPr>
               <a:t>.</a:t>
             </a:r>
@@ -8866,42 +9088,42 @@
             <a:pPr algn="ctr"/>
             <a:r>
               <a:rPr lang="it-IT" sz="2000" b="1" dirty="0">
-                <a:latin typeface="Palatino Linotype" panose="02040502050505030304" pitchFamily="18" charset="0"/>
+                <a:latin typeface="Aptos" panose="020B0004020202020204" pitchFamily="34" charset="0"/>
               </a:rPr>
               <a:t>Standard </a:t>
             </a:r>
             <a:r>
               <a:rPr lang="it-IT" sz="2000" b="1" dirty="0" err="1">
-                <a:latin typeface="Palatino Linotype" panose="02040502050505030304" pitchFamily="18" charset="0"/>
+                <a:latin typeface="Aptos" panose="020B0004020202020204" pitchFamily="34" charset="0"/>
               </a:rPr>
               <a:t>payload</a:t>
             </a:r>
             <a:r>
               <a:rPr lang="it-IT" sz="2000" b="1" dirty="0">
-                <a:latin typeface="Palatino Linotype" panose="02040502050505030304" pitchFamily="18" charset="0"/>
+                <a:latin typeface="Aptos" panose="020B0004020202020204" pitchFamily="34" charset="0"/>
               </a:rPr>
               <a:t> </a:t>
             </a:r>
             <a:r>
               <a:rPr lang="it-IT" sz="2000" b="1" dirty="0" err="1">
-                <a:latin typeface="Palatino Linotype" panose="02040502050505030304" pitchFamily="18" charset="0"/>
+                <a:latin typeface="Aptos" panose="020B0004020202020204" pitchFamily="34" charset="0"/>
               </a:rPr>
               <a:t>claim</a:t>
             </a:r>
             <a:r>
               <a:rPr lang="it-IT" sz="2000" b="1" dirty="0">
-                <a:latin typeface="Palatino Linotype" panose="02040502050505030304" pitchFamily="18" charset="0"/>
+                <a:latin typeface="Aptos" panose="020B0004020202020204" pitchFamily="34" charset="0"/>
               </a:rPr>
               <a:t> </a:t>
             </a:r>
             <a:r>
               <a:rPr lang="it-IT" sz="2000" b="1" dirty="0" err="1">
-                <a:latin typeface="Palatino Linotype" panose="02040502050505030304" pitchFamily="18" charset="0"/>
+                <a:latin typeface="Aptos" panose="020B0004020202020204" pitchFamily="34" charset="0"/>
               </a:rPr>
               <a:t>fields</a:t>
             </a:r>
             <a:endParaRPr lang="en-GB" sz="2000" b="1" dirty="0">
-              <a:latin typeface="Palatino Linotype" panose="02040502050505030304" pitchFamily="18" charset="0"/>
+              <a:latin typeface="Aptos" panose="020B0004020202020204" pitchFamily="34" charset="0"/>
             </a:endParaRPr>
           </a:p>
         </p:txBody>
@@ -8934,7 +9156,7 @@
           <a:p>
             <a:r>
               <a:rPr lang="en-GB" dirty="0">
-                <a:latin typeface="Palatino Linotype" panose="02040502050505030304" pitchFamily="18" charset="0"/>
+                <a:latin typeface="Aptos" panose="020B0004020202020204" pitchFamily="34" charset="0"/>
               </a:rPr>
               <a:t>{ </a:t>
             </a:r>
@@ -8942,19 +9164,19 @@
           <a:p>
             <a:r>
               <a:rPr lang="en-GB" dirty="0">
-                <a:latin typeface="Palatino Linotype" panose="02040502050505030304" pitchFamily="18" charset="0"/>
+                <a:latin typeface="Aptos" panose="020B0004020202020204" pitchFamily="34" charset="0"/>
               </a:rPr>
               <a:t>"</a:t>
             </a:r>
             <a:r>
               <a:rPr lang="en-GB" dirty="0" err="1">
-                <a:latin typeface="Palatino Linotype" panose="02040502050505030304" pitchFamily="18" charset="0"/>
+                <a:latin typeface="Aptos" panose="020B0004020202020204" pitchFamily="34" charset="0"/>
               </a:rPr>
               <a:t>iss</a:t>
             </a:r>
             <a:r>
               <a:rPr lang="en-GB" dirty="0">
-                <a:latin typeface="Palatino Linotype" panose="02040502050505030304" pitchFamily="18" charset="0"/>
+                <a:latin typeface="Aptos" panose="020B0004020202020204" pitchFamily="34" charset="0"/>
               </a:rPr>
               <a:t>": "https://accounts.google.com", </a:t>
             </a:r>
@@ -8962,7 +9184,7 @@
           <a:p>
             <a:r>
               <a:rPr lang="en-GB" dirty="0">
-                <a:latin typeface="Palatino Linotype" panose="02040502050505030304" pitchFamily="18" charset="0"/>
+                <a:latin typeface="Aptos" panose="020B0004020202020204" pitchFamily="34" charset="0"/>
               </a:rPr>
               <a:t>"sub": "you@gmail.com", </a:t>
             </a:r>
@@ -8970,7 +9192,7 @@
           <a:p>
             <a:r>
               <a:rPr lang="en-GB" dirty="0">
-                <a:latin typeface="Palatino Linotype" panose="02040502050505030304" pitchFamily="18" charset="0"/>
+                <a:latin typeface="Aptos" panose="020B0004020202020204" pitchFamily="34" charset="0"/>
               </a:rPr>
               <a:t>"name": “John Smith" </a:t>
             </a:r>
@@ -8978,19 +9200,19 @@
           <a:p>
             <a:r>
               <a:rPr lang="en-GB" dirty="0">
-                <a:latin typeface="Palatino Linotype" panose="02040502050505030304" pitchFamily="18" charset="0"/>
+                <a:latin typeface="Aptos" panose="020B0004020202020204" pitchFamily="34" charset="0"/>
               </a:rPr>
               <a:t>"</a:t>
             </a:r>
             <a:r>
               <a:rPr lang="en-GB" dirty="0" err="1">
-                <a:latin typeface="Palatino Linotype" panose="02040502050505030304" pitchFamily="18" charset="0"/>
+                <a:latin typeface="Aptos" panose="020B0004020202020204" pitchFamily="34" charset="0"/>
               </a:rPr>
               <a:t>aud</a:t>
             </a:r>
             <a:r>
               <a:rPr lang="en-GB" dirty="0">
-                <a:latin typeface="Palatino Linotype" panose="02040502050505030304" pitchFamily="18" charset="0"/>
+                <a:latin typeface="Aptos" panose="020B0004020202020204" pitchFamily="34" charset="0"/>
               </a:rPr>
               <a:t>": "s6BhdRkqt3", </a:t>
             </a:r>
@@ -8998,19 +9220,19 @@
           <a:p>
             <a:r>
               <a:rPr lang="en-GB" dirty="0">
-                <a:latin typeface="Palatino Linotype" panose="02040502050505030304" pitchFamily="18" charset="0"/>
+                <a:latin typeface="Aptos" panose="020B0004020202020204" pitchFamily="34" charset="0"/>
               </a:rPr>
               <a:t>"</a:t>
             </a:r>
             <a:r>
               <a:rPr lang="en-GB" dirty="0" err="1">
-                <a:latin typeface="Palatino Linotype" panose="02040502050505030304" pitchFamily="18" charset="0"/>
+                <a:latin typeface="Aptos" panose="020B0004020202020204" pitchFamily="34" charset="0"/>
               </a:rPr>
               <a:t>exp</a:t>
             </a:r>
             <a:r>
               <a:rPr lang="en-GB" dirty="0">
-                <a:latin typeface="Palatino Linotype" panose="02040502050505030304" pitchFamily="18" charset="0"/>
+                <a:latin typeface="Aptos" panose="020B0004020202020204" pitchFamily="34" charset="0"/>
               </a:rPr>
               <a:t>": 1311281970, </a:t>
             </a:r>
@@ -9018,19 +9240,19 @@
           <a:p>
             <a:r>
               <a:rPr lang="en-GB" dirty="0">
-                <a:latin typeface="Palatino Linotype" panose="02040502050505030304" pitchFamily="18" charset="0"/>
+                <a:latin typeface="Aptos" panose="020B0004020202020204" pitchFamily="34" charset="0"/>
               </a:rPr>
               <a:t>"</a:t>
             </a:r>
             <a:r>
               <a:rPr lang="en-GB" dirty="0" err="1">
-                <a:latin typeface="Palatino Linotype" panose="02040502050505030304" pitchFamily="18" charset="0"/>
+                <a:latin typeface="Aptos" panose="020B0004020202020204" pitchFamily="34" charset="0"/>
               </a:rPr>
               <a:t>iat</a:t>
             </a:r>
             <a:r>
               <a:rPr lang="en-GB" dirty="0">
-                <a:latin typeface="Palatino Linotype" panose="02040502050505030304" pitchFamily="18" charset="0"/>
+                <a:latin typeface="Aptos" panose="020B0004020202020204" pitchFamily="34" charset="0"/>
               </a:rPr>
               <a:t>": 1311280970, </a:t>
             </a:r>
@@ -9038,19 +9260,19 @@
           <a:p>
             <a:r>
               <a:rPr lang="en-GB" dirty="0">
-                <a:latin typeface="Palatino Linotype" panose="02040502050505030304" pitchFamily="18" charset="0"/>
+                <a:latin typeface="Aptos" panose="020B0004020202020204" pitchFamily="34" charset="0"/>
               </a:rPr>
               <a:t>"</a:t>
             </a:r>
             <a:r>
               <a:rPr lang="en-GB" dirty="0" err="1">
-                <a:latin typeface="Palatino Linotype" panose="02040502050505030304" pitchFamily="18" charset="0"/>
+                <a:latin typeface="Aptos" panose="020B0004020202020204" pitchFamily="34" charset="0"/>
               </a:rPr>
               <a:t>auth_time</a:t>
             </a:r>
             <a:r>
               <a:rPr lang="en-GB" dirty="0">
-                <a:latin typeface="Palatino Linotype" panose="02040502050505030304" pitchFamily="18" charset="0"/>
+                <a:latin typeface="Aptos" panose="020B0004020202020204" pitchFamily="34" charset="0"/>
               </a:rPr>
               <a:t>": 1311280969</a:t>
             </a:r>
@@ -9058,7 +9280,7 @@
           <a:p>
             <a:r>
               <a:rPr lang="en-GB" dirty="0">
-                <a:latin typeface="Palatino Linotype" panose="02040502050505030304" pitchFamily="18" charset="0"/>
+                <a:latin typeface="Aptos" panose="020B0004020202020204" pitchFamily="34" charset="0"/>
               </a:rPr>
               <a:t>} </a:t>
             </a:r>
@@ -9173,7 +9395,6 @@
                 <a:solidFill>
                   <a:srgbClr val="C7254E"/>
                 </a:solidFill>
-                <a:latin typeface="Roboto Mono"/>
               </a:rPr>
               <a:t>					</a:t>
             </a:r>
@@ -9182,14 +9403,11 @@
                 <a:solidFill>
                   <a:srgbClr val="C7254E"/>
                 </a:solidFill>
-                <a:latin typeface="Roboto Mono"/>
               </a:rPr>
               <a:t>xxxxx</a:t>
             </a:r>
             <a:r>
-              <a:rPr lang="en-US" altLang="en-US" dirty="0" err="1">
-                <a:latin typeface="Roboto Mono"/>
-              </a:rPr>
+              <a:rPr lang="en-US" altLang="en-US" dirty="0" err="1"/>
               <a:t>.</a:t>
             </a:r>
             <a:r>
@@ -9197,14 +9415,11 @@
                 <a:solidFill>
                   <a:srgbClr val="00B050"/>
                 </a:solidFill>
-                <a:latin typeface="Roboto Mono"/>
               </a:rPr>
               <a:t>yyyyy</a:t>
             </a:r>
             <a:r>
-              <a:rPr lang="en-US" altLang="en-US" dirty="0" err="1">
-                <a:latin typeface="Roboto Mono"/>
-              </a:rPr>
+              <a:rPr lang="en-US" altLang="en-US" dirty="0" err="1"/>
               <a:t>.</a:t>
             </a:r>
             <a:r>
@@ -9212,7 +9427,6 @@
                 <a:solidFill>
                   <a:srgbClr val="0070C0"/>
                 </a:solidFill>
-                <a:latin typeface="Roboto Mono"/>
               </a:rPr>
               <a:t>zzzzz</a:t>
             </a:r>
@@ -9220,7 +9434,6 @@
               <a:solidFill>
                 <a:srgbClr val="0070C0"/>
               </a:solidFill>
-              <a:latin typeface="Roboto Mono"/>
             </a:endParaRPr>
           </a:p>
           <a:p>
@@ -9231,7 +9444,6 @@
               <a:solidFill>
                 <a:srgbClr val="0070C0"/>
               </a:solidFill>
-              <a:latin typeface="Roboto Mono"/>
             </a:endParaRPr>
           </a:p>
           <a:p>
@@ -9242,7 +9454,6 @@
               <a:solidFill>
                 <a:srgbClr val="0070C0"/>
               </a:solidFill>
-              <a:latin typeface="Roboto Mono"/>
             </a:endParaRPr>
           </a:p>
           <a:p>
@@ -9305,7 +9516,6 @@
               <a:solidFill>
                 <a:srgbClr val="0070C0"/>
               </a:solidFill>
-              <a:latin typeface="Arial" panose="020B0604020202020204" pitchFamily="34" charset="0"/>
             </a:endParaRPr>
           </a:p>
           <a:p>
@@ -9339,72 +9549,72 @@
                 <a:solidFill>
                   <a:srgbClr val="0070C0"/>
                 </a:solidFill>
-                <a:latin typeface="Palatino Linotype" panose="02040502050505030304" pitchFamily="18" charset="0"/>
+                <a:latin typeface="Aptos" panose="020B0004020202020204" pitchFamily="34" charset="0"/>
               </a:rPr>
               <a:t>Signature</a:t>
             </a:r>
             <a:r>
               <a:rPr lang="it-IT" sz="2400" dirty="0">
-                <a:latin typeface="Palatino Linotype" panose="02040502050505030304" pitchFamily="18" charset="0"/>
+                <a:latin typeface="Aptos" panose="020B0004020202020204" pitchFamily="34" charset="0"/>
               </a:rPr>
               <a:t>: </a:t>
             </a:r>
             <a:r>
               <a:rPr lang="it-IT" sz="2400" dirty="0" err="1">
-                <a:latin typeface="Palatino Linotype" panose="02040502050505030304" pitchFamily="18" charset="0"/>
+                <a:latin typeface="Aptos" panose="020B0004020202020204" pitchFamily="34" charset="0"/>
               </a:rPr>
               <a:t>it</a:t>
             </a:r>
             <a:r>
               <a:rPr lang="it-IT" sz="2400" dirty="0">
-                <a:latin typeface="Palatino Linotype" panose="02040502050505030304" pitchFamily="18" charset="0"/>
+                <a:latin typeface="Aptos" panose="020B0004020202020204" pitchFamily="34" charset="0"/>
               </a:rPr>
               <a:t> </a:t>
             </a:r>
             <a:r>
               <a:rPr lang="it-IT" sz="2400" dirty="0" err="1">
-                <a:latin typeface="Palatino Linotype" panose="02040502050505030304" pitchFamily="18" charset="0"/>
+                <a:latin typeface="Aptos" panose="020B0004020202020204" pitchFamily="34" charset="0"/>
               </a:rPr>
               <a:t>contains</a:t>
             </a:r>
             <a:r>
               <a:rPr lang="it-IT" sz="2400" dirty="0">
-                <a:latin typeface="Palatino Linotype" panose="02040502050505030304" pitchFamily="18" charset="0"/>
+                <a:latin typeface="Aptos" panose="020B0004020202020204" pitchFamily="34" charset="0"/>
               </a:rPr>
               <a:t> a </a:t>
             </a:r>
             <a:r>
               <a:rPr lang="it-IT" sz="2400" dirty="0" err="1">
-                <a:latin typeface="Palatino Linotype" panose="02040502050505030304" pitchFamily="18" charset="0"/>
+                <a:latin typeface="Aptos" panose="020B0004020202020204" pitchFamily="34" charset="0"/>
               </a:rPr>
               <a:t>signature</a:t>
             </a:r>
             <a:r>
               <a:rPr lang="it-IT" sz="2400" dirty="0">
-                <a:latin typeface="Palatino Linotype" panose="02040502050505030304" pitchFamily="18" charset="0"/>
+                <a:latin typeface="Aptos" panose="020B0004020202020204" pitchFamily="34" charset="0"/>
               </a:rPr>
               <a:t> of the </a:t>
             </a:r>
             <a:r>
               <a:rPr lang="it-IT" sz="2400" dirty="0" err="1">
-                <a:latin typeface="Palatino Linotype" panose="02040502050505030304" pitchFamily="18" charset="0"/>
+                <a:latin typeface="Aptos" panose="020B0004020202020204" pitchFamily="34" charset="0"/>
               </a:rPr>
               <a:t>header</a:t>
             </a:r>
             <a:r>
               <a:rPr lang="it-IT" sz="2400" dirty="0">
-                <a:latin typeface="Palatino Linotype" panose="02040502050505030304" pitchFamily="18" charset="0"/>
+                <a:latin typeface="Aptos" panose="020B0004020202020204" pitchFamily="34" charset="0"/>
               </a:rPr>
               <a:t> and </a:t>
             </a:r>
             <a:r>
               <a:rPr lang="it-IT" sz="2400" dirty="0" err="1">
-                <a:latin typeface="Palatino Linotype" panose="02040502050505030304" pitchFamily="18" charset="0"/>
+                <a:latin typeface="Aptos" panose="020B0004020202020204" pitchFamily="34" charset="0"/>
               </a:rPr>
               <a:t>payload</a:t>
             </a:r>
             <a:endParaRPr lang="en-GB" sz="2400" dirty="0">
-              <a:latin typeface="Palatino Linotype" panose="02040502050505030304" pitchFamily="18" charset="0"/>
+              <a:latin typeface="Aptos" panose="020B0004020202020204" pitchFamily="34" charset="0"/>
             </a:endParaRPr>
           </a:p>
         </p:txBody>
@@ -9412,13 +9622,15 @@
       <p:cxnSp>
         <p:nvCxnSpPr>
           <p:cNvPr id="10" name="Connettore 2 9"/>
-          <p:cNvCxnSpPr/>
+          <p:cNvCxnSpPr>
+            <a:cxnSpLocks/>
+          </p:cNvCxnSpPr>
           <p:nvPr/>
         </p:nvCxnSpPr>
         <p:spPr>
           <a:xfrm flipH="1">
-            <a:off x="7412790" y="1747666"/>
-            <a:ext cx="211819" cy="393191"/>
+            <a:off x="6186663" y="1774763"/>
+            <a:ext cx="637047" cy="425709"/>
           </a:xfrm>
           <a:prstGeom prst="straightConnector1">
             <a:avLst/>
@@ -9551,7 +9763,7 @@
                 <a:solidFill>
                   <a:srgbClr val="C00000"/>
                 </a:solidFill>
-                <a:latin typeface="Palatino Linotype" panose="02040502050505030304" pitchFamily="18" charset="0"/>
+                <a:latin typeface="Aptos" panose="020B0004020202020204" pitchFamily="34" charset="0"/>
               </a:rPr>
               <a:t>eyJhbGciOiJSUzI1NiIsImtpZCI6IkRNa3Itd0JqRU1EYnhOY25xaVJISVhu</a:t>
             </a:r>
@@ -9562,7 +9774,7 @@
                 <a:solidFill>
                   <a:srgbClr val="C00000"/>
                 </a:solidFill>
-                <a:latin typeface="Palatino Linotype" panose="02040502050505030304" pitchFamily="18" charset="0"/>
+                <a:latin typeface="Aptos" panose="020B0004020202020204" pitchFamily="34" charset="0"/>
               </a:rPr>
               <a:t>YUxubWI3UUpfWF9rWmJyaEtBMGMifQ</a:t>
             </a:r>
@@ -9570,7 +9782,7 @@
           <a:p>
             <a:r>
               <a:rPr lang="en-GB" dirty="0">
-                <a:latin typeface="Palatino Linotype" panose="02040502050505030304" pitchFamily="18" charset="0"/>
+                <a:latin typeface="Aptos" panose="020B0004020202020204" pitchFamily="34" charset="0"/>
               </a:rPr>
               <a:t>.</a:t>
             </a:r>
@@ -9581,7 +9793,7 @@
                 <a:solidFill>
                   <a:srgbClr val="00B050"/>
                 </a:solidFill>
-                <a:latin typeface="Palatino Linotype" panose="02040502050505030304" pitchFamily="18" charset="0"/>
+                <a:latin typeface="Aptos" panose="020B0004020202020204" pitchFamily="34" charset="0"/>
               </a:rPr>
               <a:t>eyJzdWIiOiIwMHU5bzFuaWtqdk9CZzVabzBoNyIsInZlciI6MSwiaXNzIjoi</a:t>
             </a:r>
@@ -9592,7 +9804,7 @@
                 <a:solidFill>
                   <a:srgbClr val="00B050"/>
                 </a:solidFill>
-                <a:latin typeface="Palatino Linotype" panose="02040502050505030304" pitchFamily="18" charset="0"/>
+                <a:latin typeface="Aptos" panose="020B0004020202020204" pitchFamily="34" charset="0"/>
               </a:rPr>
               <a:t>aHR0cHM6Ly9kZXYtMzQxNjA3Lm9rdGFwcmV2aWV3LmNvbS9vYXV0aDIvYXVz</a:t>
             </a:r>
@@ -9603,7 +9815,7 @@
                 <a:solidFill>
                   <a:srgbClr val="00B050"/>
                 </a:solidFill>
-                <a:latin typeface="Palatino Linotype" panose="02040502050505030304" pitchFamily="18" charset="0"/>
+                <a:latin typeface="Aptos" panose="020B0004020202020204" pitchFamily="34" charset="0"/>
               </a:rPr>
               <a:t>OW84d3ZraG9ja3c5VEwwaDciLCJhdWQiOiJsWFNlbkx4eFBpOGtRVmpKRTVz</a:t>
             </a:r>
@@ -9614,7 +9826,7 @@
                 <a:solidFill>
                   <a:srgbClr val="00B050"/>
                 </a:solidFill>
-                <a:latin typeface="Palatino Linotype" panose="02040502050505030304" pitchFamily="18" charset="0"/>
+                <a:latin typeface="Aptos" panose="020B0004020202020204" pitchFamily="34" charset="0"/>
               </a:rPr>
               <a:t>NCIsImlhdCI6MTUwOTA0OTg5OCwiZXhwIjoxNTA5MDUzNDk4LCJqdGkiOiJJ</a:t>
             </a:r>
@@ -9625,7 +9837,7 @@
                 <a:solidFill>
                   <a:srgbClr val="00B050"/>
                 </a:solidFill>
-                <a:latin typeface="Palatino Linotype" panose="02040502050505030304" pitchFamily="18" charset="0"/>
+                <a:latin typeface="Aptos" panose="020B0004020202020204" pitchFamily="34" charset="0"/>
               </a:rPr>
               <a:t>RC5oa2RXSXNBSXZTbnBGYVFHTVRYUGNVSmhhMkgwS2c5Ykl3ZEVvVm1ZZHN3</a:t>
             </a:r>
@@ -9636,7 +9848,7 @@
                 <a:solidFill>
                   <a:srgbClr val="00B050"/>
                 </a:solidFill>
-                <a:latin typeface="Palatino Linotype" panose="02040502050505030304" pitchFamily="18" charset="0"/>
+                <a:latin typeface="Aptos" panose="020B0004020202020204" pitchFamily="34" charset="0"/>
               </a:rPr>
               <a:t>IiwiYW1yIjpbImtiYSIsIm1mYSIsInB3ZCJdLCJpZHAiOiIwMG85bzFuaWpr</a:t>
             </a:r>
@@ -9647,7 +9859,7 @@
                 <a:solidFill>
                   <a:srgbClr val="00B050"/>
                 </a:solidFill>
-                <a:latin typeface="Palatino Linotype" panose="02040502050505030304" pitchFamily="18" charset="0"/>
+                <a:latin typeface="Aptos" panose="020B0004020202020204" pitchFamily="34" charset="0"/>
               </a:rPr>
               <a:t>aWpLeGNpbjBoNyIsIm5vbmNlIjoidWpwMmFzeHlqN2UiLCJhdXRoX3RpbWUi</a:t>
             </a:r>
@@ -9658,7 +9870,7 @@
                 <a:solidFill>
                   <a:srgbClr val="00B050"/>
                 </a:solidFill>
-                <a:latin typeface="Palatino Linotype" panose="02040502050505030304" pitchFamily="18" charset="0"/>
+                <a:latin typeface="Aptos" panose="020B0004020202020204" pitchFamily="34" charset="0"/>
               </a:rPr>
               <a:t>OjE1MDkwNDk3MTl9</a:t>
             </a:r>
@@ -9666,7 +9878,7 @@
           <a:p>
             <a:r>
               <a:rPr lang="en-GB" dirty="0">
-                <a:latin typeface="Palatino Linotype" panose="02040502050505030304" pitchFamily="18" charset="0"/>
+                <a:latin typeface="Aptos" panose="020B0004020202020204" pitchFamily="34" charset="0"/>
               </a:rPr>
               <a:t>.</a:t>
             </a:r>
@@ -9677,7 +9889,7 @@
                 <a:solidFill>
                   <a:srgbClr val="0070C0"/>
                 </a:solidFill>
-                <a:latin typeface="Palatino Linotype" panose="02040502050505030304" pitchFamily="18" charset="0"/>
+                <a:latin typeface="Aptos" panose="020B0004020202020204" pitchFamily="34" charset="0"/>
               </a:rPr>
               <a:t>dv4Ek8B4BDee1PcQT_4zm7kxDEY1sRIGbLoNtlodZcSzHzXU5GkKyl6sAVmdXOIPUlAIrJAhNfQWQ-</a:t>
             </a:r>
@@ -9688,7 +9900,7 @@
                 <a:solidFill>
                   <a:srgbClr val="0070C0"/>
                 </a:solidFill>
-                <a:latin typeface="Palatino Linotype" panose="02040502050505030304" pitchFamily="18" charset="0"/>
+                <a:latin typeface="Aptos" panose="020B0004020202020204" pitchFamily="34" charset="0"/>
               </a:rPr>
               <a:t>_XZLBVPjETiZE8CgNg5uqNmeXMUnYnQmvN5oWlXUZ8Gcub-GAbJ8-</a:t>
             </a:r>
@@ -9699,7 +9911,7 @@
                 <a:solidFill>
                   <a:srgbClr val="0070C0"/>
                 </a:solidFill>
-                <a:latin typeface="Palatino Linotype" panose="02040502050505030304" pitchFamily="18" charset="0"/>
+                <a:latin typeface="Aptos" panose="020B0004020202020204" pitchFamily="34" charset="0"/>
               </a:rPr>
               <a:t>NQuyBmyec1j3gmGzX3wemke8NkuI6SX2L4Wj1PyvkknBtbjfiF9ud1-</a:t>
             </a:r>
@@ -9710,7 +9922,7 @@
                 <a:solidFill>
                   <a:srgbClr val="0070C0"/>
                 </a:solidFill>
-                <a:latin typeface="Palatino Linotype" panose="02040502050505030304" pitchFamily="18" charset="0"/>
+                <a:latin typeface="Aptos" panose="020B0004020202020204" pitchFamily="34" charset="0"/>
               </a:rPr>
               <a:t>ERKbobaFbnjDFOFTzvL6g34SpMmZWy6uc_Hs--n4IC-ex-</a:t>
             </a:r>
@@ -9721,7 +9933,7 @@
                 <a:solidFill>
                   <a:srgbClr val="0070C0"/>
                 </a:solidFill>
-                <a:latin typeface="Palatino Linotype" panose="02040502050505030304" pitchFamily="18" charset="0"/>
+                <a:latin typeface="Aptos" panose="020B0004020202020204" pitchFamily="34" charset="0"/>
               </a:rPr>
               <a:t>_Ps3FcMwRggCW_-7o2FpH6rJTOGPZYrOx44n3ZwAu2dGm6axtPIsqU8b6sw7DaHpogD_hxsXgMIOzOBMbYsQEiczoGn71ZFz_1O7FiW4dH6g</a:t>
             </a:r>
@@ -9755,7 +9967,7 @@
                 <a:solidFill>
                   <a:srgbClr val="C00000"/>
                 </a:solidFill>
-                <a:latin typeface="Palatino Linotype" panose="02040502050505030304" pitchFamily="18" charset="0"/>
+                <a:latin typeface="Aptos" panose="020B0004020202020204" pitchFamily="34" charset="0"/>
               </a:rPr>
               <a:t>Header</a:t>
             </a:r>
@@ -9763,7 +9975,7 @@
               <a:solidFill>
                 <a:srgbClr val="C00000"/>
               </a:solidFill>
-              <a:latin typeface="Palatino Linotype" panose="02040502050505030304" pitchFamily="18" charset="0"/>
+              <a:latin typeface="Aptos" panose="020B0004020202020204" pitchFamily="34" charset="0"/>
             </a:endParaRPr>
           </a:p>
         </p:txBody>
@@ -9795,7 +10007,7 @@
                 <a:solidFill>
                   <a:srgbClr val="00B050"/>
                 </a:solidFill>
-                <a:latin typeface="Palatino Linotype" panose="02040502050505030304" pitchFamily="18" charset="0"/>
+                <a:latin typeface="Aptos" panose="020B0004020202020204" pitchFamily="34" charset="0"/>
               </a:rPr>
               <a:t>Payload</a:t>
             </a:r>
@@ -9803,7 +10015,7 @@
               <a:solidFill>
                 <a:srgbClr val="00B050"/>
               </a:solidFill>
-              <a:latin typeface="Palatino Linotype" panose="02040502050505030304" pitchFamily="18" charset="0"/>
+              <a:latin typeface="Aptos" panose="020B0004020202020204" pitchFamily="34" charset="0"/>
             </a:endParaRPr>
           </a:p>
         </p:txBody>
@@ -9835,7 +10047,7 @@
                 <a:solidFill>
                   <a:srgbClr val="0070C0"/>
                 </a:solidFill>
-                <a:latin typeface="Palatino Linotype" panose="02040502050505030304" pitchFamily="18" charset="0"/>
+                <a:latin typeface="Aptos" panose="020B0004020202020204" pitchFamily="34" charset="0"/>
               </a:rPr>
               <a:t>Signature</a:t>
             </a:r>
@@ -9843,7 +10055,7 @@
               <a:solidFill>
                 <a:srgbClr val="0070C0"/>
               </a:solidFill>
-              <a:latin typeface="Palatino Linotype" panose="02040502050505030304" pitchFamily="18" charset="0"/>
+              <a:latin typeface="Aptos" panose="020B0004020202020204" pitchFamily="34" charset="0"/>
             </a:endParaRPr>
           </a:p>
         </p:txBody>
@@ -10279,6 +10491,7 @@
                 <a:solidFill>
                   <a:srgbClr val="C00000"/>
                 </a:solidFill>
+                <a:latin typeface="Aptos" panose="020B0004020202020204" pitchFamily="34" charset="0"/>
               </a:rPr>
               <a:t>https://impact.dei.unipd.it/bwthw/</a:t>
             </a:r>
@@ -10587,7 +10800,9 @@
               <a:buNone/>
             </a:pPr>
             <a:r>
-              <a:rPr lang="en-IT" sz="1400" dirty="0"/>
+              <a:rPr lang="en-IT" sz="1400" dirty="0">
+                <a:latin typeface="Aptos" panose="020B0004020202020204" pitchFamily="34" charset="0"/>
+              </a:rPr>
               <a:t>Your app</a:t>
             </a:r>
           </a:p>
@@ -10805,7 +11020,9 @@
               <a:buNone/>
             </a:pPr>
             <a:r>
-              <a:rPr lang="en-IT" sz="1600" b="1" dirty="0"/>
+              <a:rPr lang="en-IT" sz="1600" b="1" dirty="0">
+                <a:latin typeface="Aptos" panose="020B0004020202020204" pitchFamily="34" charset="0"/>
+              </a:rPr>
               <a:t>HTTPS requests/responses</a:t>
             </a:r>
           </a:p>
@@ -10898,7 +11115,9 @@
           <a:lstStyle/>
           <a:p>
             <a:pPr algn="ctr"/>
-            <a:endParaRPr lang="en-IT"/>
+            <a:endParaRPr lang="en-IT">
+              <a:latin typeface="Aptos" panose="020B0004020202020204" pitchFamily="34" charset="0"/>
+            </a:endParaRPr>
           </a:p>
         </p:txBody>
       </p:sp>
@@ -11114,22 +11333,32 @@
               <a:buNone/>
             </a:pPr>
             <a:r>
-              <a:rPr lang="en-IT" sz="1400" dirty="0"/>
+              <a:rPr lang="en-IT" sz="1400" dirty="0">
+                <a:latin typeface="Aptos" panose="020B0004020202020204" pitchFamily="34" charset="0"/>
+              </a:rPr>
               <a:t>(If credentials are ok) </a:t>
             </a:r>
             <a:r>
-              <a:rPr lang="en-IT" sz="1400"/>
+              <a:rPr lang="en-IT" sz="1400">
+                <a:latin typeface="Aptos" panose="020B0004020202020204" pitchFamily="34" charset="0"/>
+              </a:rPr>
               <a:t>Receive </a:t>
             </a:r>
             <a:r>
-              <a:rPr lang="en-US" sz="1400" dirty="0"/>
+              <a:rPr lang="en-US" sz="1400" dirty="0">
+                <a:latin typeface="Aptos" panose="020B0004020202020204" pitchFamily="34" charset="0"/>
+              </a:rPr>
               <a:t>JWT </a:t>
             </a:r>
             <a:r>
-              <a:rPr lang="en-IT" sz="1400"/>
+              <a:rPr lang="en-IT" sz="1400">
+                <a:latin typeface="Aptos" panose="020B0004020202020204" pitchFamily="34" charset="0"/>
+              </a:rPr>
               <a:t>token</a:t>
             </a:r>
-            <a:endParaRPr lang="en-IT" sz="1400" dirty="0"/>
+            <a:endParaRPr lang="en-IT" sz="1400" dirty="0">
+              <a:latin typeface="Aptos" panose="020B0004020202020204" pitchFamily="34" charset="0"/>
+            </a:endParaRPr>
           </a:p>
         </p:txBody>
       </p:sp>
@@ -11425,7 +11654,9 @@
               <a:buNone/>
             </a:pPr>
             <a:r>
-              <a:rPr lang="en-IT" sz="1400" dirty="0"/>
+              <a:rPr lang="en-IT" sz="1400" dirty="0">
+                <a:latin typeface="Aptos" panose="020B0004020202020204" pitchFamily="34" charset="0"/>
+              </a:rPr>
               <a:t>Ask for specific data using token</a:t>
             </a:r>
           </a:p>
@@ -11684,7 +11915,9 @@
               <a:buNone/>
             </a:pPr>
             <a:r>
-              <a:rPr lang="en-IT" sz="1400" dirty="0"/>
+              <a:rPr lang="en-IT" sz="1400" dirty="0">
+                <a:latin typeface="Aptos" panose="020B0004020202020204" pitchFamily="34" charset="0"/>
+              </a:rPr>
               <a:t>(If request is ok) Receive data (JSON format)</a:t>
             </a:r>
           </a:p>
@@ -11854,7 +12087,9 @@
           <a:lstStyle/>
           <a:p>
             <a:pPr algn="ctr"/>
-            <a:endParaRPr lang="en-IT"/>
+            <a:endParaRPr lang="en-IT">
+              <a:latin typeface="Aptos" panose="020B0004020202020204" pitchFamily="34" charset="0"/>
+            </a:endParaRPr>
           </a:p>
         </p:txBody>
       </p:sp>
@@ -11903,7 +12138,9 @@
           <a:lstStyle/>
           <a:p>
             <a:pPr algn="ctr"/>
-            <a:endParaRPr lang="en-IT"/>
+            <a:endParaRPr lang="en-IT">
+              <a:latin typeface="Aptos" panose="020B0004020202020204" pitchFamily="34" charset="0"/>
+            </a:endParaRPr>
           </a:p>
         </p:txBody>
       </p:sp>
@@ -12118,10 +12355,14 @@
               <a:buNone/>
             </a:pPr>
             <a:r>
-              <a:rPr lang="en-US" b="1" dirty="0"/>
+              <a:rPr lang="en-US" b="1" dirty="0">
+                <a:latin typeface="Aptos" panose="020B0004020202020204" pitchFamily="34" charset="0"/>
+              </a:rPr>
               <a:t>Authorization</a:t>
             </a:r>
-            <a:endParaRPr lang="en-IT" b="1" dirty="0"/>
+            <a:endParaRPr lang="en-IT" b="1" dirty="0">
+              <a:latin typeface="Aptos" panose="020B0004020202020204" pitchFamily="34" charset="0"/>
+            </a:endParaRPr>
           </a:p>
         </p:txBody>
       </p:sp>
@@ -12336,10 +12577,14 @@
               <a:buNone/>
             </a:pPr>
             <a:r>
-              <a:rPr lang="en-US" b="1" dirty="0"/>
+              <a:rPr lang="en-US" b="1" dirty="0">
+                <a:latin typeface="Aptos" panose="020B0004020202020204" pitchFamily="34" charset="0"/>
+              </a:rPr>
               <a:t>Receiving data</a:t>
             </a:r>
-            <a:endParaRPr lang="en-IT" b="1" dirty="0"/>
+            <a:endParaRPr lang="en-IT" b="1" dirty="0">
+              <a:latin typeface="Aptos" panose="020B0004020202020204" pitchFamily="34" charset="0"/>
+            </a:endParaRPr>
           </a:p>
         </p:txBody>
       </p:sp>
@@ -12713,7 +12958,7 @@
             <a:r>
               <a:rPr lang="en-US" sz="2000" b="1" dirty="0">
                 <a:effectLst/>
-                <a:latin typeface="Palatino Linotype" panose="02040502050505030304" pitchFamily="18" charset="0"/>
+                <a:latin typeface="Aptos" panose="020B0004020202020204" pitchFamily="34" charset="0"/>
                 <a:ea typeface="Palatino" pitchFamily="2" charset="77"/>
               </a:rPr>
               <a:t>Patient</a:t>
@@ -12724,12 +12969,14 @@
             <a:r>
               <a:rPr lang="en-US" sz="2000" dirty="0">
                 <a:effectLst/>
-                <a:latin typeface="Palatino Linotype" panose="02040502050505030304" pitchFamily="18" charset="0"/>
+                <a:latin typeface="Aptos" panose="020B0004020202020204" pitchFamily="34" charset="0"/>
                 <a:ea typeface="Palatino" pitchFamily="2" charset="77"/>
               </a:rPr>
               <a:t>Generates and manages its data </a:t>
             </a:r>
-            <a:endParaRPr lang="en-IT" sz="2000" dirty="0"/>
+            <a:endParaRPr lang="en-IT" sz="2000" dirty="0">
+              <a:latin typeface="Aptos" panose="020B0004020202020204" pitchFamily="34" charset="0"/>
+            </a:endParaRPr>
           </a:p>
         </p:txBody>
       </p:sp>
@@ -12765,7 +13012,7 @@
             <a:r>
               <a:rPr lang="en-US" sz="2000" b="1" dirty="0">
                 <a:effectLst/>
-                <a:latin typeface="Palatino Linotype" panose="02040502050505030304" pitchFamily="18" charset="0"/>
+                <a:latin typeface="Aptos" panose="020B0004020202020204" pitchFamily="34" charset="0"/>
                 <a:ea typeface="Palatino" pitchFamily="2" charset="77"/>
               </a:rPr>
               <a:t>Clinician</a:t>
@@ -12776,12 +13023,14 @@
             <a:r>
               <a:rPr lang="en-US" sz="2000" dirty="0">
                 <a:effectLst/>
-                <a:latin typeface="Palatino Linotype" panose="02040502050505030304" pitchFamily="18" charset="0"/>
+                <a:latin typeface="Aptos" panose="020B0004020202020204" pitchFamily="34" charset="0"/>
                 <a:ea typeface="Palatino" pitchFamily="2" charset="77"/>
               </a:rPr>
               <a:t>Enrolls patients, reviews data of patients in its clinical center, edits clinical study settings</a:t>
             </a:r>
-            <a:endParaRPr lang="en-IT" sz="2000" dirty="0"/>
+            <a:endParaRPr lang="en-IT" sz="2000" dirty="0">
+              <a:latin typeface="Aptos" panose="020B0004020202020204" pitchFamily="34" charset="0"/>
+            </a:endParaRPr>
           </a:p>
         </p:txBody>
       </p:sp>
@@ -12817,7 +13066,7 @@
             <a:r>
               <a:rPr lang="en-US" sz="2000" b="1" dirty="0">
                 <a:effectLst/>
-                <a:latin typeface="Palatino Linotype" panose="02040502050505030304" pitchFamily="18" charset="0"/>
+                <a:latin typeface="Aptos" panose="020B0004020202020204" pitchFamily="34" charset="0"/>
                 <a:ea typeface="Palatino" pitchFamily="2" charset="77"/>
               </a:rPr>
               <a:t>Researcher</a:t>
@@ -12827,7 +13076,7 @@
             <a:pPr algn="ctr"/>
             <a:r>
               <a:rPr lang="en-US" sz="2000" dirty="0">
-                <a:latin typeface="Palatino Linotype" panose="02040502050505030304" pitchFamily="18" charset="0"/>
+                <a:latin typeface="Aptos" panose="020B0004020202020204" pitchFamily="34" charset="0"/>
                 <a:ea typeface="Palatino" pitchFamily="2" charset="77"/>
               </a:rPr>
               <a:t>Accesses all data in read-only mode</a:t>
@@ -12867,7 +13116,7 @@
             <a:r>
               <a:rPr lang="en-US" sz="2000" b="1" dirty="0">
                 <a:effectLst/>
-                <a:latin typeface="Palatino Linotype" panose="02040502050505030304" pitchFamily="18" charset="0"/>
+                <a:latin typeface="Aptos" panose="020B0004020202020204" pitchFamily="34" charset="0"/>
                 <a:ea typeface="Palatino" pitchFamily="2" charset="77"/>
               </a:rPr>
               <a:t>Superuser/Study Administrator/Data Administrator</a:t>
@@ -12877,12 +13126,14 @@
             <a:pPr algn="ctr"/>
             <a:r>
               <a:rPr lang="en-US" sz="2000" dirty="0">
-                <a:latin typeface="Palatino Linotype" panose="02040502050505030304" pitchFamily="18" charset="0"/>
+                <a:latin typeface="Aptos" panose="020B0004020202020204" pitchFamily="34" charset="0"/>
                 <a:ea typeface="Palatino" pitchFamily="2" charset="77"/>
               </a:rPr>
               <a:t>They have God-like powers</a:t>
             </a:r>
-            <a:endParaRPr lang="en-IT" sz="2000" dirty="0"/>
+            <a:endParaRPr lang="en-IT" sz="2000" dirty="0">
+              <a:latin typeface="Aptos" panose="020B0004020202020204" pitchFamily="34" charset="0"/>
+            </a:endParaRPr>
           </a:p>
         </p:txBody>
       </p:sp>
@@ -13145,7 +13396,7 @@
             <a:pPr algn="ctr"/>
             <a:r>
               <a:rPr lang="it-IT" sz="2400" b="1" dirty="0">
-                <a:latin typeface="Palatino Linotype" panose="02040502050505030304" pitchFamily="18" charset="0"/>
+                <a:latin typeface="Aptos" panose="020B0004020202020204" pitchFamily="34" charset="0"/>
               </a:rPr>
               <a:t>Server</a:t>
             </a:r>
@@ -13207,7 +13458,7 @@
                 <a:solidFill>
                   <a:schemeClr val="bg1"/>
                 </a:solidFill>
-                <a:latin typeface="Palatino Linotype" panose="02040502050505030304" pitchFamily="18" charset="0"/>
+                <a:latin typeface="Aptos" panose="020B0004020202020204" pitchFamily="34" charset="0"/>
               </a:rPr>
               <a:t>Protected</a:t>
             </a:r>
@@ -13216,7 +13467,7 @@
                 <a:solidFill>
                   <a:schemeClr val="bg1"/>
                 </a:solidFill>
-                <a:latin typeface="Palatino Linotype" panose="02040502050505030304" pitchFamily="18" charset="0"/>
+                <a:latin typeface="Aptos" panose="020B0004020202020204" pitchFamily="34" charset="0"/>
               </a:rPr>
               <a:t> endpoint</a:t>
             </a:r>
@@ -13428,18 +13679,18 @@
             <a:pPr algn="ctr"/>
             <a:r>
               <a:rPr lang="it-IT" dirty="0">
-                <a:latin typeface="Palatino Linotype" panose="02040502050505030304" pitchFamily="18" charset="0"/>
+                <a:latin typeface="Aptos" panose="020B0004020202020204" pitchFamily="34" charset="0"/>
               </a:rPr>
               <a:t>Access </a:t>
             </a:r>
             <a:r>
               <a:rPr lang="it-IT" dirty="0" err="1">
-                <a:latin typeface="Palatino Linotype" panose="02040502050505030304" pitchFamily="18" charset="0"/>
+                <a:latin typeface="Aptos" panose="020B0004020202020204" pitchFamily="34" charset="0"/>
               </a:rPr>
               <a:t>request</a:t>
             </a:r>
             <a:endParaRPr lang="it-IT" dirty="0">
-              <a:latin typeface="Palatino Linotype" panose="02040502050505030304" pitchFamily="18" charset="0"/>
+              <a:latin typeface="Aptos" panose="020B0004020202020204" pitchFamily="34" charset="0"/>
             </a:endParaRPr>
           </a:p>
         </p:txBody>
@@ -13475,18 +13726,18 @@
             <a:pPr algn="ctr"/>
             <a:r>
               <a:rPr lang="it-IT" dirty="0">
-                <a:latin typeface="Palatino Linotype" panose="02040502050505030304" pitchFamily="18" charset="0"/>
+                <a:latin typeface="Aptos" panose="020B0004020202020204" pitchFamily="34" charset="0"/>
               </a:rPr>
               <a:t>Access </a:t>
             </a:r>
             <a:r>
               <a:rPr lang="it-IT" dirty="0" err="1">
-                <a:latin typeface="Palatino Linotype" panose="02040502050505030304" pitchFamily="18" charset="0"/>
+                <a:latin typeface="Aptos" panose="020B0004020202020204" pitchFamily="34" charset="0"/>
               </a:rPr>
               <a:t>request</a:t>
             </a:r>
             <a:endParaRPr lang="it-IT" dirty="0">
-              <a:latin typeface="Palatino Linotype" panose="02040502050505030304" pitchFamily="18" charset="0"/>
+              <a:latin typeface="Aptos" panose="020B0004020202020204" pitchFamily="34" charset="0"/>
             </a:endParaRPr>
           </a:p>
         </p:txBody>
@@ -13525,7 +13776,7 @@
                 <a:solidFill>
                   <a:srgbClr val="FF0000"/>
                 </a:solidFill>
-                <a:latin typeface="Palatino Linotype" panose="02040502050505030304" pitchFamily="18" charset="0"/>
+                <a:latin typeface="Aptos" panose="020B0004020202020204" pitchFamily="34" charset="0"/>
               </a:rPr>
               <a:t>Access </a:t>
             </a:r>
@@ -13534,7 +13785,7 @@
                 <a:solidFill>
                   <a:srgbClr val="FF0000"/>
                 </a:solidFill>
-                <a:latin typeface="Palatino Linotype" panose="02040502050505030304" pitchFamily="18" charset="0"/>
+                <a:latin typeface="Aptos" panose="020B0004020202020204" pitchFamily="34" charset="0"/>
               </a:rPr>
               <a:t>denied</a:t>
             </a:r>
@@ -13542,7 +13793,7 @@
               <a:solidFill>
                 <a:srgbClr val="FF0000"/>
               </a:solidFill>
-              <a:latin typeface="Palatino Linotype" panose="02040502050505030304" pitchFamily="18" charset="0"/>
+              <a:latin typeface="Aptos" panose="020B0004020202020204" pitchFamily="34" charset="0"/>
             </a:endParaRPr>
           </a:p>
         </p:txBody>
@@ -13581,7 +13832,7 @@
                 <a:solidFill>
                   <a:srgbClr val="00B050"/>
                 </a:solidFill>
-                <a:latin typeface="Palatino Linotype" panose="02040502050505030304" pitchFamily="18" charset="0"/>
+                <a:latin typeface="Aptos" panose="020B0004020202020204" pitchFamily="34" charset="0"/>
               </a:rPr>
               <a:t>Access </a:t>
             </a:r>
@@ -13590,7 +13841,7 @@
                 <a:solidFill>
                   <a:srgbClr val="00B050"/>
                 </a:solidFill>
-                <a:latin typeface="Palatino Linotype" panose="02040502050505030304" pitchFamily="18" charset="0"/>
+                <a:latin typeface="Aptos" panose="020B0004020202020204" pitchFamily="34" charset="0"/>
               </a:rPr>
               <a:t>granted</a:t>
             </a:r>
@@ -13598,7 +13849,7 @@
               <a:solidFill>
                 <a:srgbClr val="00B050"/>
               </a:solidFill>
-              <a:latin typeface="Palatino Linotype" panose="02040502050505030304" pitchFamily="18" charset="0"/>
+              <a:latin typeface="Aptos" panose="020B0004020202020204" pitchFamily="34" charset="0"/>
             </a:endParaRPr>
           </a:p>
         </p:txBody>
@@ -13633,13 +13884,13 @@
           <a:p>
             <a:r>
               <a:rPr lang="it-IT" sz="2000" dirty="0" err="1">
-                <a:latin typeface="Palatino Linotype" panose="02040502050505030304" pitchFamily="18" charset="0"/>
+                <a:latin typeface="Aptos" panose="020B0004020202020204" pitchFamily="34" charset="0"/>
               </a:rPr>
               <a:t>Unauthorized</a:t>
             </a:r>
             <a:r>
               <a:rPr lang="it-IT" sz="2000" dirty="0">
-                <a:latin typeface="Palatino Linotype" panose="02040502050505030304" pitchFamily="18" charset="0"/>
+                <a:latin typeface="Aptos" panose="020B0004020202020204" pitchFamily="34" charset="0"/>
               </a:rPr>
               <a:t> user</a:t>
             </a:r>
@@ -13676,13 +13927,13 @@
           <a:p>
             <a:r>
               <a:rPr lang="it-IT" sz="2000" dirty="0" err="1">
-                <a:latin typeface="Palatino Linotype" panose="02040502050505030304" pitchFamily="18" charset="0"/>
+                <a:latin typeface="Aptos" panose="020B0004020202020204" pitchFamily="34" charset="0"/>
               </a:rPr>
               <a:t>Authorized</a:t>
             </a:r>
             <a:r>
               <a:rPr lang="it-IT" sz="2000" dirty="0">
-                <a:latin typeface="Palatino Linotype" panose="02040502050505030304" pitchFamily="18" charset="0"/>
+                <a:latin typeface="Aptos" panose="020B0004020202020204" pitchFamily="34" charset="0"/>
               </a:rPr>
               <a:t> user</a:t>
             </a:r>
@@ -14025,47 +14276,69 @@
           </a:lstStyle>
           <a:p>
             <a:r>
-              <a:rPr lang="en-IT" dirty="0"/>
+              <a:rPr lang="en-IT" dirty="0">
+                <a:latin typeface="Aptos" panose="020B0004020202020204" pitchFamily="34" charset="0"/>
+              </a:rPr>
               <a:t>Each group will have access to the data using the researcher role</a:t>
             </a:r>
           </a:p>
           <a:p>
-            <a:endParaRPr lang="en-IT" dirty="0"/>
-          </a:p>
-          <a:p>
-            <a:endParaRPr lang="en-IT" dirty="0"/>
-          </a:p>
-          <a:p>
-            <a:endParaRPr lang="en-IT" dirty="0"/>
-          </a:p>
-          <a:p>
-            <a:endParaRPr lang="en-IT" dirty="0"/>
-          </a:p>
-          <a:p>
-            <a:r>
-              <a:rPr lang="en-IT" dirty="0"/>
+            <a:endParaRPr lang="en-IT" dirty="0">
+              <a:latin typeface="Aptos" panose="020B0004020202020204" pitchFamily="34" charset="0"/>
+            </a:endParaRPr>
+          </a:p>
+          <a:p>
+            <a:endParaRPr lang="en-IT" dirty="0">
+              <a:latin typeface="Aptos" panose="020B0004020202020204" pitchFamily="34" charset="0"/>
+            </a:endParaRPr>
+          </a:p>
+          <a:p>
+            <a:endParaRPr lang="en-IT" dirty="0">
+              <a:latin typeface="Aptos" panose="020B0004020202020204" pitchFamily="34" charset="0"/>
+            </a:endParaRPr>
+          </a:p>
+          <a:p>
+            <a:endParaRPr lang="en-IT" dirty="0">
+              <a:latin typeface="Aptos" panose="020B0004020202020204" pitchFamily="34" charset="0"/>
+            </a:endParaRPr>
+          </a:p>
+          <a:p>
+            <a:r>
+              <a:rPr lang="en-IT" dirty="0">
+                <a:latin typeface="Aptos" panose="020B0004020202020204" pitchFamily="34" charset="0"/>
+              </a:rPr>
               <a:t>Each researcher in IMPACT is characterized by a username and an access expiration date. </a:t>
             </a:r>
           </a:p>
           <a:p>
             <a:r>
-              <a:rPr lang="en-IT" dirty="0"/>
+              <a:rPr lang="en-IT" dirty="0">
+                <a:latin typeface="Aptos" panose="020B0004020202020204" pitchFamily="34" charset="0"/>
+              </a:rPr>
               <a:t>The access expiration date defines the date until </a:t>
             </a:r>
             <a:r>
-              <a:rPr lang="en-IT"/>
+              <a:rPr lang="en-IT">
+                <a:latin typeface="Aptos" panose="020B0004020202020204" pitchFamily="34" charset="0"/>
+              </a:rPr>
               <a:t>a spec</a:t>
             </a:r>
             <a:r>
-              <a:rPr lang="en-US" dirty="0" err="1"/>
+              <a:rPr lang="en-US" dirty="0" err="1">
+                <a:latin typeface="Aptos" panose="020B0004020202020204" pitchFamily="34" charset="0"/>
+              </a:rPr>
               <a:t>i</a:t>
             </a:r>
             <a:r>
-              <a:rPr lang="en-IT"/>
+              <a:rPr lang="en-IT">
+                <a:latin typeface="Aptos" panose="020B0004020202020204" pitchFamily="34" charset="0"/>
+              </a:rPr>
               <a:t>fic </a:t>
             </a:r>
             <a:r>
-              <a:rPr lang="en-IT" dirty="0"/>
+              <a:rPr lang="en-IT" dirty="0">
+                <a:latin typeface="Aptos" panose="020B0004020202020204" pitchFamily="34" charset="0"/>
+              </a:rPr>
               <a:t>researcher is allowed to access data stored in the IMPACT database. Two examples:</a:t>
             </a:r>
           </a:p>
@@ -14105,7 +14378,7 @@
                   <a:srgbClr val="000000"/>
                 </a:solidFill>
                 <a:effectLst/>
-                <a:latin typeface="Menlo" panose="020B0609030804020204" pitchFamily="49" charset="0"/>
+                <a:latin typeface="Aptos" panose="020B0004020202020204" pitchFamily="34" charset="0"/>
               </a:rPr>
               <a:t>{</a:t>
             </a:r>
@@ -14117,7 +14390,7 @@
                   <a:srgbClr val="A31515"/>
                 </a:solidFill>
                 <a:effectLst/>
-                <a:latin typeface="Menlo" panose="020B0609030804020204" pitchFamily="49" charset="0"/>
+                <a:latin typeface="Aptos" panose="020B0004020202020204" pitchFamily="34" charset="0"/>
               </a:rPr>
               <a:t>"username"</a:t>
             </a:r>
@@ -14127,7 +14400,7 @@
                   <a:srgbClr val="000000"/>
                 </a:solidFill>
                 <a:effectLst/>
-                <a:latin typeface="Menlo" panose="020B0609030804020204" pitchFamily="49" charset="0"/>
+                <a:latin typeface="Aptos" panose="020B0004020202020204" pitchFamily="34" charset="0"/>
               </a:rPr>
               <a:t>: </a:t>
             </a:r>
@@ -14137,7 +14410,7 @@
                   <a:srgbClr val="0451A5"/>
                 </a:solidFill>
                 <a:effectLst/>
-                <a:latin typeface="Menlo" panose="020B0609030804020204" pitchFamily="49" charset="0"/>
+                <a:latin typeface="Aptos" panose="020B0004020202020204" pitchFamily="34" charset="0"/>
               </a:rPr>
               <a:t>”&lt;YOUR_USERNAME&gt;"</a:t>
             </a:r>
@@ -14147,7 +14420,7 @@
                   <a:srgbClr val="000000"/>
                 </a:solidFill>
                 <a:effectLst/>
-                <a:latin typeface="Menlo" panose="020B0609030804020204" pitchFamily="49" charset="0"/>
+                <a:latin typeface="Aptos" panose="020B0004020202020204" pitchFamily="34" charset="0"/>
               </a:rPr>
               <a:t>,</a:t>
             </a:r>
@@ -14159,7 +14432,7 @@
                   <a:srgbClr val="A31515"/>
                 </a:solidFill>
                 <a:effectLst/>
-                <a:latin typeface="Menlo" panose="020B0609030804020204" pitchFamily="49" charset="0"/>
+                <a:latin typeface="Aptos" panose="020B0004020202020204" pitchFamily="34" charset="0"/>
               </a:rPr>
               <a:t>"</a:t>
             </a:r>
@@ -14169,7 +14442,7 @@
                   <a:srgbClr val="A31515"/>
                 </a:solidFill>
                 <a:effectLst/>
-                <a:latin typeface="Menlo" panose="020B0609030804020204" pitchFamily="49" charset="0"/>
+                <a:latin typeface="Aptos" panose="020B0004020202020204" pitchFamily="34" charset="0"/>
               </a:rPr>
               <a:t>access_expiration_date</a:t>
             </a:r>
@@ -14179,7 +14452,7 @@
                   <a:srgbClr val="A31515"/>
                 </a:solidFill>
                 <a:effectLst/>
-                <a:latin typeface="Menlo" panose="020B0609030804020204" pitchFamily="49" charset="0"/>
+                <a:latin typeface="Aptos" panose="020B0004020202020204" pitchFamily="34" charset="0"/>
               </a:rPr>
               <a:t>"</a:t>
             </a:r>
@@ -14189,7 +14462,7 @@
                   <a:srgbClr val="000000"/>
                 </a:solidFill>
                 <a:effectLst/>
-                <a:latin typeface="Menlo" panose="020B0609030804020204" pitchFamily="49" charset="0"/>
+                <a:latin typeface="Aptos" panose="020B0004020202020204" pitchFamily="34" charset="0"/>
               </a:rPr>
               <a:t>: </a:t>
             </a:r>
@@ -14199,7 +14472,7 @@
                   <a:srgbClr val="0451A5"/>
                 </a:solidFill>
                 <a:effectLst/>
-                <a:latin typeface="Menlo" panose="020B0609030804020204" pitchFamily="49" charset="0"/>
+                <a:latin typeface="Aptos" panose="020B0004020202020204" pitchFamily="34" charset="0"/>
               </a:rPr>
               <a:t>“&lt;YOUR_ACCESS_EXPIRATION_DATE&gt;”</a:t>
             </a:r>
@@ -14208,7 +14481,7 @@
                 <a:srgbClr val="000000"/>
               </a:solidFill>
               <a:effectLst/>
-              <a:latin typeface="Menlo" panose="020B0609030804020204" pitchFamily="49" charset="0"/>
+              <a:latin typeface="Aptos" panose="020B0004020202020204" pitchFamily="34" charset="0"/>
             </a:endParaRPr>
           </a:p>
           <a:p>
@@ -14218,7 +14491,7 @@
                   <a:srgbClr val="000000"/>
                 </a:solidFill>
                 <a:effectLst/>
-                <a:latin typeface="Menlo" panose="020B0609030804020204" pitchFamily="49" charset="0"/>
+                <a:latin typeface="Aptos" panose="020B0004020202020204" pitchFamily="34" charset="0"/>
               </a:rPr>
               <a:t>}</a:t>
             </a:r>
@@ -14259,7 +14532,7 @@
                   <a:srgbClr val="000000"/>
                 </a:solidFill>
                 <a:effectLst/>
-                <a:latin typeface="Menlo" panose="020B0609030804020204" pitchFamily="49" charset="0"/>
+                <a:latin typeface="Aptos" panose="020B0004020202020204" pitchFamily="34" charset="0"/>
               </a:rPr>
               <a:t>{</a:t>
             </a:r>
@@ -14271,7 +14544,7 @@
                   <a:srgbClr val="A31515"/>
                 </a:solidFill>
                 <a:effectLst/>
-                <a:latin typeface="Menlo" panose="020B0609030804020204" pitchFamily="49" charset="0"/>
+                <a:latin typeface="Aptos" panose="020B0004020202020204" pitchFamily="34" charset="0"/>
               </a:rPr>
               <a:t>"username"</a:t>
             </a:r>
@@ -14281,7 +14554,7 @@
                   <a:srgbClr val="000000"/>
                 </a:solidFill>
                 <a:effectLst/>
-                <a:latin typeface="Menlo" panose="020B0609030804020204" pitchFamily="49" charset="0"/>
+                <a:latin typeface="Aptos" panose="020B0004020202020204" pitchFamily="34" charset="0"/>
               </a:rPr>
               <a:t>: </a:t>
             </a:r>
@@ -14291,7 +14564,7 @@
                   <a:srgbClr val="0451A5"/>
                 </a:solidFill>
                 <a:effectLst/>
-                <a:latin typeface="Menlo" panose="020B0609030804020204" pitchFamily="49" charset="0"/>
+                <a:latin typeface="Aptos" panose="020B0004020202020204" pitchFamily="34" charset="0"/>
               </a:rPr>
               <a:t>"nmRTlOv7W8"</a:t>
             </a:r>
@@ -14301,7 +14574,7 @@
                   <a:srgbClr val="000000"/>
                 </a:solidFill>
                 <a:effectLst/>
-                <a:latin typeface="Menlo" panose="020B0609030804020204" pitchFamily="49" charset="0"/>
+                <a:latin typeface="Aptos" panose="020B0004020202020204" pitchFamily="34" charset="0"/>
               </a:rPr>
               <a:t>,</a:t>
             </a:r>
@@ -14313,7 +14586,7 @@
                   <a:srgbClr val="A31515"/>
                 </a:solidFill>
                 <a:effectLst/>
-                <a:latin typeface="Menlo" panose="020B0609030804020204" pitchFamily="49" charset="0"/>
+                <a:latin typeface="Aptos" panose="020B0004020202020204" pitchFamily="34" charset="0"/>
               </a:rPr>
               <a:t>"</a:t>
             </a:r>
@@ -14323,7 +14596,7 @@
                   <a:srgbClr val="A31515"/>
                 </a:solidFill>
                 <a:effectLst/>
-                <a:latin typeface="Menlo" panose="020B0609030804020204" pitchFamily="49" charset="0"/>
+                <a:latin typeface="Aptos" panose="020B0004020202020204" pitchFamily="34" charset="0"/>
               </a:rPr>
               <a:t>access_expiration_date</a:t>
             </a:r>
@@ -14333,7 +14606,7 @@
                   <a:srgbClr val="A31515"/>
                 </a:solidFill>
                 <a:effectLst/>
-                <a:latin typeface="Menlo" panose="020B0609030804020204" pitchFamily="49" charset="0"/>
+                <a:latin typeface="Aptos" panose="020B0004020202020204" pitchFamily="34" charset="0"/>
               </a:rPr>
               <a:t>"</a:t>
             </a:r>
@@ -14343,7 +14616,7 @@
                   <a:srgbClr val="000000"/>
                 </a:solidFill>
                 <a:effectLst/>
-                <a:latin typeface="Menlo" panose="020B0609030804020204" pitchFamily="49" charset="0"/>
+                <a:latin typeface="Aptos" panose="020B0004020202020204" pitchFamily="34" charset="0"/>
               </a:rPr>
               <a:t>: </a:t>
             </a:r>
@@ -14353,7 +14626,7 @@
                   <a:srgbClr val="0451A5"/>
                 </a:solidFill>
                 <a:effectLst/>
-                <a:latin typeface="Menlo" panose="020B0609030804020204" pitchFamily="49" charset="0"/>
+                <a:latin typeface="Aptos" panose="020B0004020202020204" pitchFamily="34" charset="0"/>
               </a:rPr>
               <a:t>"2024-09-30"</a:t>
             </a:r>
@@ -14362,7 +14635,7 @@
                 <a:srgbClr val="000000"/>
               </a:solidFill>
               <a:effectLst/>
-              <a:latin typeface="Menlo" panose="020B0609030804020204" pitchFamily="49" charset="0"/>
+              <a:latin typeface="Aptos" panose="020B0004020202020204" pitchFamily="34" charset="0"/>
             </a:endParaRPr>
           </a:p>
           <a:p>
@@ -14372,7 +14645,7 @@
                   <a:srgbClr val="000000"/>
                 </a:solidFill>
                 <a:effectLst/>
-                <a:latin typeface="Menlo" panose="020B0609030804020204" pitchFamily="49" charset="0"/>
+                <a:latin typeface="Aptos" panose="020B0004020202020204" pitchFamily="34" charset="0"/>
               </a:rPr>
               <a:t>}</a:t>
             </a:r>
@@ -14413,7 +14686,7 @@
                   <a:srgbClr val="000000"/>
                 </a:solidFill>
                 <a:effectLst/>
-                <a:latin typeface="Menlo" panose="020B0609030804020204" pitchFamily="49" charset="0"/>
+                <a:latin typeface="Aptos" panose="020B0004020202020204" pitchFamily="34" charset="0"/>
               </a:rPr>
               <a:t>{</a:t>
             </a:r>
@@ -14425,7 +14698,7 @@
                   <a:srgbClr val="A31515"/>
                 </a:solidFill>
                 <a:effectLst/>
-                <a:latin typeface="Menlo" panose="020B0609030804020204" pitchFamily="49" charset="0"/>
+                <a:latin typeface="Aptos" panose="020B0004020202020204" pitchFamily="34" charset="0"/>
               </a:rPr>
               <a:t>"username"</a:t>
             </a:r>
@@ -14435,7 +14708,7 @@
                   <a:srgbClr val="000000"/>
                 </a:solidFill>
                 <a:effectLst/>
-                <a:latin typeface="Menlo" panose="020B0609030804020204" pitchFamily="49" charset="0"/>
+                <a:latin typeface="Aptos" panose="020B0004020202020204" pitchFamily="34" charset="0"/>
               </a:rPr>
               <a:t>: </a:t>
             </a:r>
@@ -14445,7 +14718,7 @@
                   <a:srgbClr val="0451A5"/>
                 </a:solidFill>
                 <a:effectLst/>
-                <a:latin typeface="Menlo" panose="020B0609030804020204" pitchFamily="49" charset="0"/>
+                <a:latin typeface="Aptos" panose="020B0004020202020204" pitchFamily="34" charset="0"/>
               </a:rPr>
               <a:t>"nmRTlOv7W8"</a:t>
             </a:r>
@@ -14455,7 +14728,7 @@
                   <a:srgbClr val="000000"/>
                 </a:solidFill>
                 <a:effectLst/>
-                <a:latin typeface="Menlo" panose="020B0609030804020204" pitchFamily="49" charset="0"/>
+                <a:latin typeface="Aptos" panose="020B0004020202020204" pitchFamily="34" charset="0"/>
               </a:rPr>
               <a:t>,</a:t>
             </a:r>
@@ -14467,7 +14740,7 @@
                   <a:srgbClr val="A31515"/>
                 </a:solidFill>
                 <a:effectLst/>
-                <a:latin typeface="Menlo" panose="020B0609030804020204" pitchFamily="49" charset="0"/>
+                <a:latin typeface="Aptos" panose="020B0004020202020204" pitchFamily="34" charset="0"/>
               </a:rPr>
               <a:t>"</a:t>
             </a:r>
@@ -14477,7 +14750,7 @@
                   <a:srgbClr val="A31515"/>
                 </a:solidFill>
                 <a:effectLst/>
-                <a:latin typeface="Menlo" panose="020B0609030804020204" pitchFamily="49" charset="0"/>
+                <a:latin typeface="Aptos" panose="020B0004020202020204" pitchFamily="34" charset="0"/>
               </a:rPr>
               <a:t>access_expiration_date</a:t>
             </a:r>
@@ -14487,7 +14760,7 @@
                   <a:srgbClr val="A31515"/>
                 </a:solidFill>
                 <a:effectLst/>
-                <a:latin typeface="Menlo" panose="020B0609030804020204" pitchFamily="49" charset="0"/>
+                <a:latin typeface="Aptos" panose="020B0004020202020204" pitchFamily="34" charset="0"/>
               </a:rPr>
               <a:t>"</a:t>
             </a:r>
@@ -14497,7 +14770,7 @@
                   <a:srgbClr val="000000"/>
                 </a:solidFill>
                 <a:effectLst/>
-                <a:latin typeface="Menlo" panose="020B0609030804020204" pitchFamily="49" charset="0"/>
+                <a:latin typeface="Aptos" panose="020B0004020202020204" pitchFamily="34" charset="0"/>
               </a:rPr>
               <a:t>: </a:t>
             </a:r>
@@ -14507,7 +14780,7 @@
                   <a:srgbClr val="0451A5"/>
                 </a:solidFill>
                 <a:effectLst/>
-                <a:latin typeface="Menlo" panose="020B0609030804020204" pitchFamily="49" charset="0"/>
+                <a:latin typeface="Aptos" panose="020B0004020202020204" pitchFamily="34" charset="0"/>
               </a:rPr>
               <a:t>null</a:t>
             </a:r>
@@ -14516,7 +14789,7 @@
                 <a:srgbClr val="000000"/>
               </a:solidFill>
               <a:effectLst/>
-              <a:latin typeface="Menlo" panose="020B0609030804020204" pitchFamily="49" charset="0"/>
+              <a:latin typeface="Aptos" panose="020B0004020202020204" pitchFamily="34" charset="0"/>
             </a:endParaRPr>
           </a:p>
           <a:p>
@@ -14526,7 +14799,7 @@
                   <a:srgbClr val="000000"/>
                 </a:solidFill>
                 <a:effectLst/>
-                <a:latin typeface="Menlo" panose="020B0609030804020204" pitchFamily="49" charset="0"/>
+                <a:latin typeface="Aptos" panose="020B0004020202020204" pitchFamily="34" charset="0"/>
               </a:rPr>
               <a:t>}</a:t>
             </a:r>
@@ -16476,20 +16749,20 @@
           <a:p>
             <a:pPr algn="ctr"/>
             <a:endParaRPr lang="en-GB" sz="2400">
-              <a:latin typeface="Palatino Linotype" panose="02040502050505030304" pitchFamily="18" charset="0"/>
+              <a:latin typeface="Aptos" panose="020B0004020202020204" pitchFamily="34" charset="0"/>
             </a:endParaRPr>
           </a:p>
           <a:p>
             <a:pPr algn="ctr"/>
             <a:endParaRPr lang="en-GB" sz="2400">
-              <a:latin typeface="Palatino Linotype" panose="02040502050505030304" pitchFamily="18" charset="0"/>
+              <a:latin typeface="Aptos" panose="020B0004020202020204" pitchFamily="34" charset="0"/>
             </a:endParaRPr>
           </a:p>
           <a:p>
             <a:pPr algn="ctr"/>
             <a:r>
               <a:rPr lang="en-GB" sz="2400">
-                <a:latin typeface="Palatino Linotype" panose="02040502050505030304" pitchFamily="18" charset="0"/>
+                <a:latin typeface="Aptos" panose="020B0004020202020204" pitchFamily="34" charset="0"/>
               </a:rPr>
               <a:t>Client</a:t>
             </a:r>
@@ -16542,7 +16815,7 @@
           <a:p>
             <a:r>
               <a:rPr lang="it-IT" sz="2400" dirty="0">
-                <a:latin typeface="Palatino Linotype" panose="02040502050505030304" pitchFamily="18" charset="0"/>
+                <a:latin typeface="Aptos" panose="020B0004020202020204" pitchFamily="34" charset="0"/>
               </a:rPr>
               <a:t> Server</a:t>
             </a:r>
@@ -16666,7 +16939,7 @@
             <a:pPr algn="ctr"/>
             <a:r>
               <a:rPr lang="en-GB" dirty="0">
-                <a:latin typeface="Palatino Linotype" panose="02040502050505030304" pitchFamily="18" charset="0"/>
+                <a:latin typeface="Aptos" panose="020B0004020202020204" pitchFamily="34" charset="0"/>
               </a:rPr>
               <a:t>Unauthorized request</a:t>
             </a:r>
@@ -16675,7 +16948,7 @@
             <a:pPr algn="ctr"/>
             <a:r>
               <a:rPr lang="en-GB" dirty="0">
-                <a:latin typeface="Palatino Linotype" panose="02040502050505030304" pitchFamily="18" charset="0"/>
+                <a:latin typeface="Aptos" panose="020B0004020202020204" pitchFamily="34" charset="0"/>
               </a:rPr>
               <a:t>GET /home HTTP/1.1</a:t>
             </a:r>
@@ -16713,7 +16986,7 @@
             <a:pPr algn="ctr"/>
             <a:r>
               <a:rPr lang="en-GB" dirty="0">
-                <a:latin typeface="Palatino Linotype" panose="02040502050505030304" pitchFamily="18" charset="0"/>
+                <a:latin typeface="Aptos" panose="020B0004020202020204" pitchFamily="34" charset="0"/>
               </a:rPr>
               <a:t>The server responds authorization is needed:</a:t>
             </a:r>
@@ -16721,7 +16994,7 @@
           <a:p>
             <a:r>
               <a:rPr lang="en-GB" dirty="0">
-                <a:latin typeface="Palatino Linotype" panose="02040502050505030304" pitchFamily="18" charset="0"/>
+                <a:latin typeface="Aptos" panose="020B0004020202020204" pitchFamily="34" charset="0"/>
               </a:rPr>
               <a:t>HTTP/1.1 401 Unauthorized</a:t>
             </a:r>
@@ -16729,7 +17002,7 @@
           <a:p>
             <a:r>
               <a:rPr lang="en-GB" dirty="0">
-                <a:latin typeface="Palatino Linotype" panose="02040502050505030304" pitchFamily="18" charset="0"/>
+                <a:latin typeface="Aptos" panose="020B0004020202020204" pitchFamily="34" charset="0"/>
               </a:rPr>
               <a:t>WWW-Authenticate: Basic realm=’’protection space’’</a:t>
             </a:r>
@@ -16809,7 +17082,7 @@
             <a:pPr algn="ctr"/>
             <a:r>
               <a:rPr lang="en-GB" dirty="0">
-                <a:latin typeface="Palatino Linotype" panose="02040502050505030304" pitchFamily="18" charset="0"/>
+                <a:latin typeface="Aptos" panose="020B0004020202020204" pitchFamily="34" charset="0"/>
               </a:rPr>
               <a:t>Authorized request</a:t>
             </a:r>
@@ -16817,7 +17090,7 @@
           <a:p>
             <a:r>
               <a:rPr lang="en-GB" dirty="0">
-                <a:latin typeface="Palatino Linotype" panose="02040502050505030304" pitchFamily="18" charset="0"/>
+                <a:latin typeface="Aptos" panose="020B0004020202020204" pitchFamily="34" charset="0"/>
               </a:rPr>
               <a:t>GET /home HTTP/1.1</a:t>
             </a:r>
@@ -16825,7 +17098,7 @@
           <a:p>
             <a:r>
               <a:rPr lang="en-GB" dirty="0">
-                <a:latin typeface="Palatino Linotype" panose="02040502050505030304" pitchFamily="18" charset="0"/>
+                <a:latin typeface="Aptos" panose="020B0004020202020204" pitchFamily="34" charset="0"/>
               </a:rPr>
               <a:t>Authorization: Basic &lt;credentials&gt;</a:t>
             </a:r>
@@ -16863,7 +17136,7 @@
             <a:pPr algn="ctr"/>
             <a:r>
               <a:rPr lang="en-GB" dirty="0">
-                <a:latin typeface="Palatino Linotype" panose="02040502050505030304" pitchFamily="18" charset="0"/>
+                <a:latin typeface="Aptos" panose="020B0004020202020204" pitchFamily="34" charset="0"/>
               </a:rPr>
               <a:t>Server’s response to authorized request</a:t>
             </a:r>
@@ -16871,7 +17144,7 @@
           <a:p>
             <a:r>
               <a:rPr lang="en-GB" dirty="0">
-                <a:latin typeface="Palatino Linotype" panose="02040502050505030304" pitchFamily="18" charset="0"/>
+                <a:latin typeface="Aptos" panose="020B0004020202020204" pitchFamily="34" charset="0"/>
               </a:rPr>
               <a:t>    HTTP/1.1 200 OK</a:t>
             </a:r>
@@ -16879,7 +17152,7 @@
           <a:p>
             <a:r>
               <a:rPr lang="en-GB" dirty="0">
-                <a:latin typeface="Palatino Linotype" panose="02040502050505030304" pitchFamily="18" charset="0"/>
+                <a:latin typeface="Aptos" panose="020B0004020202020204" pitchFamily="34" charset="0"/>
               </a:rPr>
               <a:t>    HTTP/1.1 403 Forbidden</a:t>
             </a:r>
@@ -16984,18 +17257,18 @@
             <a:pPr algn="ctr"/>
             <a:r>
               <a:rPr lang="it-IT" dirty="0">
-                <a:latin typeface="Palatino Linotype" panose="02040502050505030304" pitchFamily="18" charset="0"/>
+                <a:latin typeface="Aptos" panose="020B0004020202020204" pitchFamily="34" charset="0"/>
               </a:rPr>
               <a:t>DB of </a:t>
             </a:r>
             <a:r>
               <a:rPr lang="it-IT" dirty="0" err="1">
-                <a:latin typeface="Palatino Linotype" panose="02040502050505030304" pitchFamily="18" charset="0"/>
+                <a:latin typeface="Aptos" panose="020B0004020202020204" pitchFamily="34" charset="0"/>
               </a:rPr>
               <a:t>credentials</a:t>
             </a:r>
             <a:endParaRPr lang="it-IT" dirty="0">
-              <a:latin typeface="Palatino Linotype" panose="02040502050505030304" pitchFamily="18" charset="0"/>
+              <a:latin typeface="Aptos" panose="020B0004020202020204" pitchFamily="34" charset="0"/>
             </a:endParaRPr>
           </a:p>
         </p:txBody>
@@ -17054,30 +17327,30 @@
             <a:pPr algn="ctr"/>
             <a:r>
               <a:rPr lang="it-IT" dirty="0">
-                <a:latin typeface="Palatino Linotype" panose="02040502050505030304" pitchFamily="18" charset="0"/>
+                <a:latin typeface="Aptos" panose="020B0004020202020204" pitchFamily="34" charset="0"/>
               </a:rPr>
               <a:t>DB of </a:t>
             </a:r>
             <a:r>
               <a:rPr lang="it-IT" dirty="0" err="1">
-                <a:latin typeface="Palatino Linotype" panose="02040502050505030304" pitchFamily="18" charset="0"/>
+                <a:latin typeface="Aptos" panose="020B0004020202020204" pitchFamily="34" charset="0"/>
               </a:rPr>
               <a:t>protected</a:t>
             </a:r>
             <a:r>
               <a:rPr lang="it-IT" dirty="0">
-                <a:latin typeface="Palatino Linotype" panose="02040502050505030304" pitchFamily="18" charset="0"/>
+                <a:latin typeface="Aptos" panose="020B0004020202020204" pitchFamily="34" charset="0"/>
               </a:rPr>
               <a:t> </a:t>
             </a:r>
             <a:r>
               <a:rPr lang="it-IT" dirty="0" err="1">
-                <a:latin typeface="Palatino Linotype" panose="02040502050505030304" pitchFamily="18" charset="0"/>
+                <a:latin typeface="Aptos" panose="020B0004020202020204" pitchFamily="34" charset="0"/>
               </a:rPr>
               <a:t>resources</a:t>
             </a:r>
             <a:endParaRPr lang="it-IT" dirty="0">
-              <a:latin typeface="Palatino Linotype" panose="02040502050505030304" pitchFamily="18" charset="0"/>
+              <a:latin typeface="Aptos" panose="020B0004020202020204" pitchFamily="34" charset="0"/>
             </a:endParaRPr>
           </a:p>
         </p:txBody>
@@ -17228,6 +17501,7 @@
               <a:solidFill>
                 <a:schemeClr val="tx1"/>
               </a:solidFill>
+              <a:latin typeface="Aptos" panose="020B0004020202020204" pitchFamily="34" charset="0"/>
             </a:endParaRPr>
           </a:p>
         </p:txBody>
@@ -17263,24 +17537,24 @@
             <a:pPr algn="ctr"/>
             <a:r>
               <a:rPr lang="it-IT" dirty="0" err="1">
-                <a:latin typeface="Palatino Linotype" panose="02040502050505030304" pitchFamily="18" charset="0"/>
+                <a:latin typeface="Aptos" panose="020B0004020202020204" pitchFamily="34" charset="0"/>
               </a:rPr>
               <a:t>Ask</a:t>
             </a:r>
             <a:r>
               <a:rPr lang="it-IT" dirty="0">
-                <a:latin typeface="Palatino Linotype" panose="02040502050505030304" pitchFamily="18" charset="0"/>
+                <a:latin typeface="Aptos" panose="020B0004020202020204" pitchFamily="34" charset="0"/>
               </a:rPr>
               <a:t> </a:t>
             </a:r>
             <a:r>
               <a:rPr lang="it-IT" dirty="0" err="1">
-                <a:latin typeface="Palatino Linotype" panose="02040502050505030304" pitchFamily="18" charset="0"/>
+                <a:latin typeface="Aptos" panose="020B0004020202020204" pitchFamily="34" charset="0"/>
               </a:rPr>
               <a:t>user</a:t>
             </a:r>
             <a:endParaRPr lang="it-IT" dirty="0">
-              <a:latin typeface="Palatino Linotype" panose="02040502050505030304" pitchFamily="18" charset="0"/>
+              <a:latin typeface="Aptos" panose="020B0004020202020204" pitchFamily="34" charset="0"/>
             </a:endParaRPr>
           </a:p>
         </p:txBody>
@@ -17422,18 +17696,18 @@
             <a:pPr algn="ctr"/>
             <a:r>
               <a:rPr lang="it-IT" dirty="0">
-                <a:latin typeface="Palatino Linotype" panose="02040502050505030304" pitchFamily="18" charset="0"/>
+                <a:latin typeface="Aptos" panose="020B0004020202020204" pitchFamily="34" charset="0"/>
               </a:rPr>
               <a:t>Access control </a:t>
             </a:r>
             <a:r>
               <a:rPr lang="it-IT" dirty="0" err="1">
-                <a:latin typeface="Palatino Linotype" panose="02040502050505030304" pitchFamily="18" charset="0"/>
+                <a:latin typeface="Aptos" panose="020B0004020202020204" pitchFamily="34" charset="0"/>
               </a:rPr>
               <a:t>program</a:t>
             </a:r>
             <a:endParaRPr lang="it-IT" dirty="0">
-              <a:latin typeface="Palatino Linotype" panose="02040502050505030304" pitchFamily="18" charset="0"/>
+              <a:latin typeface="Aptos" panose="020B0004020202020204" pitchFamily="34" charset="0"/>
             </a:endParaRPr>
           </a:p>
         </p:txBody>
@@ -17469,7 +17743,7 @@
             <a:pPr algn="ctr"/>
             <a:r>
               <a:rPr lang="en-GB" dirty="0">
-                <a:latin typeface="Palatino Linotype" panose="02040502050505030304" pitchFamily="18" charset="0"/>
+                <a:latin typeface="Aptos" panose="020B0004020202020204" pitchFamily="34" charset="0"/>
               </a:rPr>
               <a:t>or</a:t>
             </a:r>
@@ -17531,7 +17805,7 @@
                 <a:solidFill>
                   <a:schemeClr val="tx1"/>
                 </a:solidFill>
-                <a:latin typeface="Palatino Linotype" panose="02040502050505030304" pitchFamily="18" charset="0"/>
+                <a:latin typeface="Aptos" panose="020B0004020202020204" pitchFamily="34" charset="0"/>
               </a:rPr>
               <a:t>How can </a:t>
             </a:r>
@@ -17540,7 +17814,7 @@
                 <a:solidFill>
                   <a:schemeClr val="tx1"/>
                 </a:solidFill>
-                <a:latin typeface="Palatino Linotype" panose="02040502050505030304" pitchFamily="18" charset="0"/>
+                <a:latin typeface="Aptos" panose="020B0004020202020204" pitchFamily="34" charset="0"/>
               </a:rPr>
               <a:t>we</a:t>
             </a:r>
@@ -17549,7 +17823,7 @@
                 <a:solidFill>
                   <a:schemeClr val="tx1"/>
                 </a:solidFill>
-                <a:latin typeface="Palatino Linotype" panose="02040502050505030304" pitchFamily="18" charset="0"/>
+                <a:latin typeface="Aptos" panose="020B0004020202020204" pitchFamily="34" charset="0"/>
               </a:rPr>
               <a:t> </a:t>
             </a:r>
@@ -17558,7 +17832,7 @@
                 <a:solidFill>
                   <a:schemeClr val="tx1"/>
                 </a:solidFill>
-                <a:latin typeface="Palatino Linotype" panose="02040502050505030304" pitchFamily="18" charset="0"/>
+                <a:latin typeface="Aptos" panose="020B0004020202020204" pitchFamily="34" charset="0"/>
               </a:rPr>
               <a:t>protect</a:t>
             </a:r>
@@ -17567,7 +17841,7 @@
                 <a:solidFill>
                   <a:schemeClr val="tx1"/>
                 </a:solidFill>
-                <a:latin typeface="Palatino Linotype" panose="02040502050505030304" pitchFamily="18" charset="0"/>
+                <a:latin typeface="Aptos" panose="020B0004020202020204" pitchFamily="34" charset="0"/>
               </a:rPr>
               <a:t> the transmission of </a:t>
             </a:r>
@@ -17576,7 +17850,7 @@
                 <a:solidFill>
                   <a:schemeClr val="tx1"/>
                 </a:solidFill>
-                <a:latin typeface="Palatino Linotype" panose="02040502050505030304" pitchFamily="18" charset="0"/>
+                <a:latin typeface="Aptos" panose="020B0004020202020204" pitchFamily="34" charset="0"/>
               </a:rPr>
               <a:t>credentials</a:t>
             </a:r>
@@ -17585,7 +17859,7 @@
                 <a:solidFill>
                   <a:schemeClr val="tx1"/>
                 </a:solidFill>
-                <a:latin typeface="Palatino Linotype" panose="02040502050505030304" pitchFamily="18" charset="0"/>
+                <a:latin typeface="Aptos" panose="020B0004020202020204" pitchFamily="34" charset="0"/>
               </a:rPr>
               <a:t>?</a:t>
             </a:r>
@@ -18165,7 +18439,7 @@
           <a:p>
             <a:r>
               <a:rPr lang="en-GB" dirty="0"/>
-              <a:t>Its uses an </a:t>
+              <a:t>It uses a </a:t>
             </a:r>
             <a:r>
               <a:rPr lang="en-GB" b="1" dirty="0"/>
@@ -18255,7 +18529,7 @@
                 <a:solidFill>
                   <a:prstClr val="black"/>
                 </a:solidFill>
-                <a:latin typeface="Palatino Linotype" panose="02040502050505030304" pitchFamily="18" charset="0"/>
+                <a:latin typeface="Aptos" panose="020B0004020202020204" pitchFamily="34" charset="0"/>
               </a:rPr>
               <a:t>Alternative solution: encrypted communication with the </a:t>
             </a:r>
@@ -18264,7 +18538,7 @@
                 <a:solidFill>
                   <a:prstClr val="black"/>
                 </a:solidFill>
-                <a:latin typeface="Palatino Linotype" panose="02040502050505030304" pitchFamily="18" charset="0"/>
+                <a:latin typeface="Aptos" panose="020B0004020202020204" pitchFamily="34" charset="0"/>
               </a:rPr>
               <a:t>HTTPS</a:t>
             </a:r>
@@ -18273,7 +18547,7 @@
                 <a:solidFill>
                   <a:prstClr val="black"/>
                 </a:solidFill>
-                <a:latin typeface="Palatino Linotype" panose="02040502050505030304" pitchFamily="18" charset="0"/>
+                <a:latin typeface="Aptos" panose="020B0004020202020204" pitchFamily="34" charset="0"/>
               </a:rPr>
               <a:t> protocol.</a:t>
             </a:r>
@@ -18326,20 +18600,20 @@
           <a:p>
             <a:pPr algn="ctr"/>
             <a:endParaRPr lang="en-GB" sz="2400" dirty="0">
-              <a:latin typeface="Palatino Linotype" panose="02040502050505030304" pitchFamily="18" charset="0"/>
+              <a:latin typeface="Aptos" panose="020B0004020202020204" pitchFamily="34" charset="0"/>
             </a:endParaRPr>
           </a:p>
           <a:p>
             <a:pPr algn="ctr"/>
             <a:endParaRPr lang="en-GB" sz="2400" dirty="0">
-              <a:latin typeface="Palatino Linotype" panose="02040502050505030304" pitchFamily="18" charset="0"/>
+              <a:latin typeface="Aptos" panose="020B0004020202020204" pitchFamily="34" charset="0"/>
             </a:endParaRPr>
           </a:p>
           <a:p>
             <a:pPr algn="ctr"/>
             <a:r>
               <a:rPr lang="en-GB" sz="2400" dirty="0">
-                <a:latin typeface="Palatino Linotype" panose="02040502050505030304" pitchFamily="18" charset="0"/>
+                <a:latin typeface="Aptos" panose="020B0004020202020204" pitchFamily="34" charset="0"/>
               </a:rPr>
               <a:t>Client</a:t>
             </a:r>
@@ -18392,7 +18666,7 @@
           <a:p>
             <a:r>
               <a:rPr lang="it-IT" sz="2400" dirty="0">
-                <a:latin typeface="Palatino Linotype" panose="02040502050505030304" pitchFamily="18" charset="0"/>
+                <a:latin typeface="Aptos" panose="020B0004020202020204" pitchFamily="34" charset="0"/>
               </a:rPr>
               <a:t> Server</a:t>
             </a:r>
@@ -18413,8 +18687,8 @@
         </p:nvSpPr>
         <p:spPr>
           <a:xfrm>
-            <a:off x="6890716" y="2301255"/>
-            <a:ext cx="1696278" cy="731223"/>
+            <a:off x="6890716" y="2194953"/>
+            <a:ext cx="1696278" cy="837526"/>
           </a:xfrm>
           <a:prstGeom prst="can">
             <a:avLst/>
@@ -18447,14 +18721,20 @@
           <a:p>
             <a:pPr algn="ctr"/>
             <a:r>
-              <a:rPr lang="it-IT" dirty="0"/>
+              <a:rPr lang="it-IT" dirty="0">
+                <a:latin typeface="Aptos" panose="020B0004020202020204" pitchFamily="34" charset="0"/>
+              </a:rPr>
               <a:t>DB of </a:t>
             </a:r>
             <a:r>
-              <a:rPr lang="it-IT" dirty="0" err="1"/>
+              <a:rPr lang="it-IT" dirty="0" err="1">
+                <a:latin typeface="Aptos" panose="020B0004020202020204" pitchFamily="34" charset="0"/>
+              </a:rPr>
               <a:t>credentials</a:t>
             </a:r>
-            <a:endParaRPr lang="it-IT" dirty="0"/>
+            <a:endParaRPr lang="it-IT" dirty="0">
+              <a:latin typeface="Aptos" panose="020B0004020202020204" pitchFamily="34" charset="0"/>
+            </a:endParaRPr>
           </a:p>
         </p:txBody>
       </p:sp>
@@ -18472,8 +18752,8 @@
         </p:nvSpPr>
         <p:spPr>
           <a:xfrm>
-            <a:off x="10067550" y="2319310"/>
-            <a:ext cx="1696278" cy="731223"/>
+            <a:off x="10067550" y="1871406"/>
+            <a:ext cx="1696278" cy="1179128"/>
           </a:xfrm>
           <a:prstGeom prst="can">
             <a:avLst/>
@@ -18506,22 +18786,32 @@
           <a:p>
             <a:pPr algn="ctr"/>
             <a:r>
-              <a:rPr lang="it-IT" dirty="0"/>
+              <a:rPr lang="it-IT" dirty="0">
+                <a:latin typeface="Aptos" panose="020B0004020202020204" pitchFamily="34" charset="0"/>
+              </a:rPr>
               <a:t>DB of </a:t>
             </a:r>
             <a:r>
-              <a:rPr lang="it-IT" dirty="0" err="1"/>
+              <a:rPr lang="it-IT" dirty="0" err="1">
+                <a:latin typeface="Aptos" panose="020B0004020202020204" pitchFamily="34" charset="0"/>
+              </a:rPr>
               <a:t>protected</a:t>
             </a:r>
             <a:r>
-              <a:rPr lang="it-IT" dirty="0"/>
+              <a:rPr lang="it-IT" dirty="0">
+                <a:latin typeface="Aptos" panose="020B0004020202020204" pitchFamily="34" charset="0"/>
+              </a:rPr>
               <a:t> </a:t>
             </a:r>
             <a:r>
-              <a:rPr lang="it-IT" dirty="0" err="1"/>
+              <a:rPr lang="it-IT" dirty="0" err="1">
+                <a:latin typeface="Aptos" panose="020B0004020202020204" pitchFamily="34" charset="0"/>
+              </a:rPr>
               <a:t>resources</a:t>
             </a:r>
-            <a:endParaRPr lang="it-IT" dirty="0"/>
+            <a:endParaRPr lang="it-IT" dirty="0">
+              <a:latin typeface="Aptos" panose="020B0004020202020204" pitchFamily="34" charset="0"/>
+            </a:endParaRPr>
           </a:p>
         </p:txBody>
       </p:sp>
@@ -18662,18 +18952,18 @@
             <a:pPr algn="ctr"/>
             <a:r>
               <a:rPr lang="it-IT" b="1" dirty="0">
-                <a:latin typeface="Palatino Linotype" panose="02040502050505030304" pitchFamily="18" charset="0"/>
+                <a:latin typeface="Aptos" panose="020B0004020202020204" pitchFamily="34" charset="0"/>
               </a:rPr>
               <a:t>Access control </a:t>
             </a:r>
             <a:r>
               <a:rPr lang="it-IT" b="1" dirty="0" err="1">
-                <a:latin typeface="Palatino Linotype" panose="02040502050505030304" pitchFamily="18" charset="0"/>
+                <a:latin typeface="Aptos" panose="020B0004020202020204" pitchFamily="34" charset="0"/>
               </a:rPr>
               <a:t>program</a:t>
             </a:r>
             <a:endParaRPr lang="it-IT" b="1" dirty="0">
-              <a:latin typeface="Palatino Linotype" panose="02040502050505030304" pitchFamily="18" charset="0"/>
+              <a:latin typeface="Aptos" panose="020B0004020202020204" pitchFamily="34" charset="0"/>
             </a:endParaRPr>
           </a:p>
         </p:txBody>
@@ -18795,7 +19085,7 @@
             <a:pPr algn="ctr"/>
             <a:r>
               <a:rPr lang="en-GB" dirty="0">
-                <a:latin typeface="Palatino Linotype" panose="02040502050505030304" pitchFamily="18" charset="0"/>
+                <a:latin typeface="Aptos" panose="020B0004020202020204" pitchFamily="34" charset="0"/>
               </a:rPr>
               <a:t>Unauthorized request</a:t>
             </a:r>
@@ -18833,7 +19123,7 @@
             <a:pPr algn="ctr"/>
             <a:r>
               <a:rPr lang="en-GB" dirty="0">
-                <a:latin typeface="Palatino Linotype" panose="02040502050505030304" pitchFamily="18" charset="0"/>
+                <a:latin typeface="Aptos" panose="020B0004020202020204" pitchFamily="34" charset="0"/>
               </a:rPr>
               <a:t>Authorization is needed </a:t>
             </a:r>
@@ -18842,9 +19132,9 @@
             <a:pPr algn="ctr"/>
             <a:r>
               <a:rPr lang="en-GB" dirty="0">
-                <a:latin typeface="Palatino Linotype" panose="02040502050505030304" pitchFamily="18" charset="0"/>
-              </a:rPr>
-              <a:t>+ random nonce (large number, N)</a:t>
+                <a:latin typeface="Aptos" panose="020B0004020202020204" pitchFamily="34" charset="0"/>
+              </a:rPr>
+              <a:t>+ random number (large number, N)</a:t>
             </a:r>
           </a:p>
         </p:txBody>
@@ -18922,7 +19212,7 @@
             <a:pPr algn="ctr"/>
             <a:r>
               <a:rPr lang="en-GB" dirty="0">
-                <a:latin typeface="Palatino Linotype" panose="02040502050505030304" pitchFamily="18" charset="0"/>
+                <a:latin typeface="Aptos" panose="020B0004020202020204" pitchFamily="34" charset="0"/>
               </a:rPr>
               <a:t>h(credentials, N)</a:t>
             </a:r>
@@ -19004,7 +19294,7 @@
             <a:pPr algn="ctr"/>
             <a:r>
               <a:rPr lang="en-GB" dirty="0">
-                <a:latin typeface="Palatino Linotype" panose="02040502050505030304" pitchFamily="18" charset="0"/>
+                <a:latin typeface="Aptos" panose="020B0004020202020204" pitchFamily="34" charset="0"/>
               </a:rPr>
               <a:t>Server’s response to authorized request</a:t>
             </a:r>
@@ -19063,7 +19353,7 @@
             <a:pPr algn="ctr"/>
             <a:r>
               <a:rPr lang="it-IT" b="1" dirty="0">
-                <a:latin typeface="Palatino Linotype" panose="02040502050505030304" pitchFamily="18" charset="0"/>
+                <a:latin typeface="Aptos" panose="020B0004020202020204" pitchFamily="34" charset="0"/>
               </a:rPr>
               <a:t>h(·)</a:t>
             </a:r>
@@ -19101,7 +19391,7 @@
             <a:pPr algn="ctr"/>
             <a:r>
               <a:rPr lang="en-GB" dirty="0">
-                <a:latin typeface="Palatino Linotype" panose="02040502050505030304" pitchFamily="18" charset="0"/>
+                <a:latin typeface="Aptos" panose="020B0004020202020204" pitchFamily="34" charset="0"/>
               </a:rPr>
               <a:t>h(credentials, N)</a:t>
             </a:r>
@@ -19139,7 +19429,7 @@
             <a:pPr algn="ctr"/>
             <a:r>
               <a:rPr lang="en-GB" dirty="0">
-                <a:latin typeface="Palatino Linotype" panose="02040502050505030304" pitchFamily="18" charset="0"/>
+                <a:latin typeface="Aptos" panose="020B0004020202020204" pitchFamily="34" charset="0"/>
               </a:rPr>
               <a:t>credentials, N</a:t>
             </a:r>
@@ -19177,7 +19467,7 @@
             <a:pPr algn="ctr"/>
             <a:r>
               <a:rPr lang="en-GB" dirty="0">
-                <a:latin typeface="Palatino Linotype" panose="02040502050505030304" pitchFamily="18" charset="0"/>
+                <a:latin typeface="Aptos" panose="020B0004020202020204" pitchFamily="34" charset="0"/>
               </a:rPr>
               <a:t>h’(credentials, N)</a:t>
             </a:r>
@@ -19368,18 +19658,18 @@
             <a:pPr algn="ctr"/>
             <a:r>
               <a:rPr lang="it-IT" b="1" dirty="0">
-                <a:latin typeface="Palatino Linotype" panose="02040502050505030304" pitchFamily="18" charset="0"/>
+                <a:latin typeface="Aptos" panose="020B0004020202020204" pitchFamily="34" charset="0"/>
               </a:rPr>
               <a:t>Digest </a:t>
             </a:r>
             <a:r>
               <a:rPr lang="it-IT" b="1" dirty="0" err="1">
-                <a:latin typeface="Palatino Linotype" panose="02040502050505030304" pitchFamily="18" charset="0"/>
+                <a:latin typeface="Aptos" panose="020B0004020202020204" pitchFamily="34" charset="0"/>
               </a:rPr>
               <a:t>comparison</a:t>
             </a:r>
             <a:endParaRPr lang="it-IT" b="1" dirty="0">
-              <a:latin typeface="Palatino Linotype" panose="02040502050505030304" pitchFamily="18" charset="0"/>
+              <a:latin typeface="Aptos" panose="020B0004020202020204" pitchFamily="34" charset="0"/>
             </a:endParaRPr>
           </a:p>
         </p:txBody>
@@ -19662,7 +19952,7 @@
             <a:pPr algn="ctr"/>
             <a:r>
               <a:rPr lang="it-IT" b="1" dirty="0">
-                <a:latin typeface="Palatino Linotype" panose="02040502050505030304" pitchFamily="18" charset="0"/>
+                <a:latin typeface="Aptos" panose="020B0004020202020204" pitchFamily="34" charset="0"/>
               </a:rPr>
               <a:t>h(·)</a:t>
             </a:r>
@@ -19700,7 +19990,7 @@
             <a:pPr algn="ctr"/>
             <a:r>
               <a:rPr lang="en-GB" dirty="0">
-                <a:latin typeface="Palatino Linotype" panose="02040502050505030304" pitchFamily="18" charset="0"/>
+                <a:latin typeface="Aptos" panose="020B0004020202020204" pitchFamily="34" charset="0"/>
               </a:rPr>
               <a:t>credentials, N</a:t>
             </a:r>
@@ -20917,6 +21207,57 @@
           </a:p>
         </p:txBody>
       </p:sp>
+      <p:sp>
+        <p:nvSpPr>
+          <p:cNvPr id="5" name="Rectangle 4">
+            <a:extLst>
+              <a:ext uri="{FF2B5EF4-FFF2-40B4-BE49-F238E27FC236}">
+                <a16:creationId xmlns:a16="http://schemas.microsoft.com/office/drawing/2014/main" id="{53A91F81-05DB-4AA3-CD46-F14FF41D7979}"/>
+              </a:ext>
+            </a:extLst>
+          </p:cNvPr>
+          <p:cNvSpPr/>
+          <p:nvPr/>
+        </p:nvSpPr>
+        <p:spPr>
+          <a:xfrm>
+            <a:off x="164706" y="353508"/>
+            <a:ext cx="1913992" cy="477078"/>
+          </a:xfrm>
+          <a:prstGeom prst="rect">
+            <a:avLst/>
+          </a:prstGeom>
+        </p:spPr>
+        <p:style>
+          <a:lnRef idx="2">
+            <a:schemeClr val="accent6">
+              <a:shade val="15000"/>
+            </a:schemeClr>
+          </a:lnRef>
+          <a:fillRef idx="1">
+            <a:schemeClr val="accent6"/>
+          </a:fillRef>
+          <a:effectRef idx="0">
+            <a:schemeClr val="accent6"/>
+          </a:effectRef>
+          <a:fontRef idx="minor">
+            <a:schemeClr val="lt1"/>
+          </a:fontRef>
+        </p:style>
+        <p:txBody>
+          <a:bodyPr rtlCol="0" anchor="ctr"/>
+          <a:lstStyle/>
+          <a:p>
+            <a:pPr algn="ctr"/>
+            <a:r>
+              <a:rPr lang="en-US" b="1" dirty="0">
+                <a:latin typeface="Aptos" panose="020B0004020202020204" pitchFamily="34" charset="0"/>
+              </a:rPr>
+              <a:t>BONUS</a:t>
+            </a:r>
+          </a:p>
+        </p:txBody>
+      </p:sp>
     </p:spTree>
     <p:extLst>
       <p:ext uri="{BB962C8B-B14F-4D97-AF65-F5344CB8AC3E}">
@@ -21291,6 +21632,57 @@
           </a:prstGeom>
         </p:spPr>
       </p:pic>
+      <p:sp>
+        <p:nvSpPr>
+          <p:cNvPr id="3" name="Rectangle 2">
+            <a:extLst>
+              <a:ext uri="{FF2B5EF4-FFF2-40B4-BE49-F238E27FC236}">
+                <a16:creationId xmlns:a16="http://schemas.microsoft.com/office/drawing/2014/main" id="{612E3008-9F33-43B8-CC16-BD702DD8780C}"/>
+              </a:ext>
+            </a:extLst>
+          </p:cNvPr>
+          <p:cNvSpPr/>
+          <p:nvPr/>
+        </p:nvSpPr>
+        <p:spPr>
+          <a:xfrm>
+            <a:off x="164706" y="353508"/>
+            <a:ext cx="1149744" cy="477078"/>
+          </a:xfrm>
+          <a:prstGeom prst="rect">
+            <a:avLst/>
+          </a:prstGeom>
+        </p:spPr>
+        <p:style>
+          <a:lnRef idx="2">
+            <a:schemeClr val="accent6">
+              <a:shade val="15000"/>
+            </a:schemeClr>
+          </a:lnRef>
+          <a:fillRef idx="1">
+            <a:schemeClr val="accent6"/>
+          </a:fillRef>
+          <a:effectRef idx="0">
+            <a:schemeClr val="accent6"/>
+          </a:effectRef>
+          <a:fontRef idx="minor">
+            <a:schemeClr val="lt1"/>
+          </a:fontRef>
+        </p:style>
+        <p:txBody>
+          <a:bodyPr rtlCol="0" anchor="ctr"/>
+          <a:lstStyle/>
+          <a:p>
+            <a:pPr algn="ctr"/>
+            <a:r>
+              <a:rPr lang="en-US" b="1" dirty="0">
+                <a:latin typeface="Aptos" panose="020B0004020202020204" pitchFamily="34" charset="0"/>
+              </a:rPr>
+              <a:t>BONUS</a:t>
+            </a:r>
+          </a:p>
+        </p:txBody>
+      </p:sp>
     </p:spTree>
     <p:extLst>
       <p:ext uri="{BB962C8B-B14F-4D97-AF65-F5344CB8AC3E}">
@@ -21511,6 +21903,57 @@
           </a:prstGeom>
         </p:spPr>
       </p:pic>
+      <p:sp>
+        <p:nvSpPr>
+          <p:cNvPr id="5" name="Rectangle 4">
+            <a:extLst>
+              <a:ext uri="{FF2B5EF4-FFF2-40B4-BE49-F238E27FC236}">
+                <a16:creationId xmlns:a16="http://schemas.microsoft.com/office/drawing/2014/main" id="{4E293D2D-D7E8-294D-E152-AD514A25AF46}"/>
+              </a:ext>
+            </a:extLst>
+          </p:cNvPr>
+          <p:cNvSpPr/>
+          <p:nvPr/>
+        </p:nvSpPr>
+        <p:spPr>
+          <a:xfrm>
+            <a:off x="164706" y="353508"/>
+            <a:ext cx="1913992" cy="477078"/>
+          </a:xfrm>
+          <a:prstGeom prst="rect">
+            <a:avLst/>
+          </a:prstGeom>
+        </p:spPr>
+        <p:style>
+          <a:lnRef idx="2">
+            <a:schemeClr val="accent6">
+              <a:shade val="15000"/>
+            </a:schemeClr>
+          </a:lnRef>
+          <a:fillRef idx="1">
+            <a:schemeClr val="accent6"/>
+          </a:fillRef>
+          <a:effectRef idx="0">
+            <a:schemeClr val="accent6"/>
+          </a:effectRef>
+          <a:fontRef idx="minor">
+            <a:schemeClr val="lt1"/>
+          </a:fontRef>
+        </p:style>
+        <p:txBody>
+          <a:bodyPr rtlCol="0" anchor="ctr"/>
+          <a:lstStyle/>
+          <a:p>
+            <a:pPr algn="ctr"/>
+            <a:r>
+              <a:rPr lang="en-US" b="1" dirty="0">
+                <a:latin typeface="Aptos" panose="020B0004020202020204" pitchFamily="34" charset="0"/>
+              </a:rPr>
+              <a:t>BONUS</a:t>
+            </a:r>
+          </a:p>
+        </p:txBody>
+      </p:sp>
     </p:spTree>
     <p:extLst>
       <p:ext uri="{BB962C8B-B14F-4D97-AF65-F5344CB8AC3E}">
@@ -21871,6 +22314,57 @@
               <a:t>9</a:t>
             </a:fld>
             <a:endParaRPr lang="en-GB"/>
+          </a:p>
+        </p:txBody>
+      </p:sp>
+      <p:sp>
+        <p:nvSpPr>
+          <p:cNvPr id="5" name="Rectangle 4">
+            <a:extLst>
+              <a:ext uri="{FF2B5EF4-FFF2-40B4-BE49-F238E27FC236}">
+                <a16:creationId xmlns:a16="http://schemas.microsoft.com/office/drawing/2014/main" id="{9842139E-FB2B-CAC8-EE77-A3D9B1D5BC16}"/>
+              </a:ext>
+            </a:extLst>
+          </p:cNvPr>
+          <p:cNvSpPr/>
+          <p:nvPr/>
+        </p:nvSpPr>
+        <p:spPr>
+          <a:xfrm>
+            <a:off x="164706" y="353508"/>
+            <a:ext cx="1913992" cy="477078"/>
+          </a:xfrm>
+          <a:prstGeom prst="rect">
+            <a:avLst/>
+          </a:prstGeom>
+        </p:spPr>
+        <p:style>
+          <a:lnRef idx="2">
+            <a:schemeClr val="accent6">
+              <a:shade val="15000"/>
+            </a:schemeClr>
+          </a:lnRef>
+          <a:fillRef idx="1">
+            <a:schemeClr val="accent6"/>
+          </a:fillRef>
+          <a:effectRef idx="0">
+            <a:schemeClr val="accent6"/>
+          </a:effectRef>
+          <a:fontRef idx="minor">
+            <a:schemeClr val="lt1"/>
+          </a:fontRef>
+        </p:style>
+        <p:txBody>
+          <a:bodyPr rtlCol="0" anchor="ctr"/>
+          <a:lstStyle/>
+          <a:p>
+            <a:pPr algn="ctr"/>
+            <a:r>
+              <a:rPr lang="en-US" b="1" dirty="0">
+                <a:latin typeface="Aptos" panose="020B0004020202020204" pitchFamily="34" charset="0"/>
+              </a:rPr>
+              <a:t>BONUS</a:t>
+            </a:r>
           </a:p>
         </p:txBody>
       </p:sp>
